--- a/wada-tue-scoping-review/manuscripts/individual_figures/Figure_4.pptx
+++ b/wada-tue-scoping-review/manuscripts/individual_figures/Figure_4.pptx
@@ -3096,7 +3096,7 @@
         </p:nvSpPr>
         <p:spPr>
           <a:xfrm>
-            <a:off x="457200" y="182880"/>
+            <a:off x="457200" y="91440"/>
             <a:ext cx="11247120" cy="548640"/>
           </a:xfrm>
           <a:prstGeom prst="rect">
@@ -3112,36 +3112,52 @@
           <a:p>
             <a:pPr algn="ctr"/>
             <a:r>
-              <a:rPr b="1" sz="2400"/>
-              <a:t>Figure 4</a:t>
-            </a:r>
-          </a:p>
-        </p:txBody>
-      </p:sp>
-      <p:pic>
-        <p:nvPicPr>
-          <p:cNvPr id="3" name="Picture 2" descr="fig3_timeline.png"/>
-          <p:cNvPicPr>
-            <a:picLocks noChangeAspect="1"/>
-          </p:cNvPicPr>
+              <a:rPr b="1" sz="2000">
+                <a:solidFill>
+                  <a:srgbClr val="1B3A5C"/>
+                </a:solidFill>
+              </a:rPr>
+              <a:t>Figure 4. Timeline of Clinical Guideline Updates vs.
+WADA TUE Regulatory Changes (2018–2026)</a:t>
+            </a:r>
+          </a:p>
+        </p:txBody>
+      </p:sp>
+      <p:cxnSp>
+        <p:nvCxnSpPr>
+          <p:cNvPr id="3" name="Connector 2"/>
+          <p:cNvCxnSpPr/>
           <p:nvPr/>
-        </p:nvPicPr>
-        <p:blipFill>
-          <a:blip r:embed="rId2"/>
-          <a:stretch>
-            <a:fillRect/>
-          </a:stretch>
-        </p:blipFill>
-        <p:spPr>
-          <a:xfrm>
-            <a:off x="1066647" y="914400"/>
-            <a:ext cx="10058400" cy="4278211"/>
-          </a:xfrm>
-          <a:prstGeom prst="rect">
+        </p:nvCxnSpPr>
+        <p:spPr>
+          <a:xfrm>
+            <a:off x="914400" y="3429000"/>
+            <a:ext cx="10332720" cy="0"/>
+          </a:xfrm>
+          <a:prstGeom prst="line">
             <a:avLst/>
           </a:prstGeom>
-        </p:spPr>
-      </p:pic>
+          <a:ln w="25400">
+            <a:solidFill>
+              <a:srgbClr val="424242"/>
+            </a:solidFill>
+          </a:ln>
+        </p:spPr>
+        <p:style>
+          <a:lnRef idx="2">
+            <a:schemeClr val="accent1"/>
+          </a:lnRef>
+          <a:fillRef idx="0">
+            <a:schemeClr val="accent1"/>
+          </a:fillRef>
+          <a:effectRef idx="1">
+            <a:schemeClr val="accent1"/>
+          </a:effectRef>
+          <a:fontRef idx="minor">
+            <a:schemeClr val="tx1"/>
+          </a:fontRef>
+        </p:style>
+      </p:cxnSp>
       <p:sp>
         <p:nvSpPr>
           <p:cNvPr id="4" name="TextBox 3"/>
@@ -3150,8 +3166,8 @@
         </p:nvSpPr>
         <p:spPr>
           <a:xfrm>
-            <a:off x="457200" y="5943600"/>
-            <a:ext cx="11247120" cy="731520"/>
+            <a:off x="1097280" y="3520440"/>
+            <a:ext cx="731520" cy="274320"/>
           </a:xfrm>
           <a:prstGeom prst="rect">
             <a:avLst/>
@@ -3159,6 +3175,990 @@
           <a:noFill/>
         </p:spPr>
         <p:txBody>
+          <a:bodyPr wrap="none">
+            <a:spAutoFit/>
+          </a:bodyPr>
+          <a:lstStyle/>
+          <a:p>
+            <a:pPr algn="ctr"/>
+            <a:r>
+              <a:rPr sz="800" b="1"/>
+              <a:t>2018</a:t>
+            </a:r>
+          </a:p>
+        </p:txBody>
+      </p:sp>
+      <p:sp>
+        <p:nvSpPr>
+          <p:cNvPr id="5" name="TextBox 4"/>
+          <p:cNvSpPr txBox="1"/>
+          <p:nvPr/>
+        </p:nvSpPr>
+        <p:spPr>
+          <a:xfrm>
+            <a:off x="2221991" y="3520440"/>
+            <a:ext cx="731520" cy="274320"/>
+          </a:xfrm>
+          <a:prstGeom prst="rect">
+            <a:avLst/>
+          </a:prstGeom>
+          <a:noFill/>
+        </p:spPr>
+        <p:txBody>
+          <a:bodyPr wrap="none">
+            <a:spAutoFit/>
+          </a:bodyPr>
+          <a:lstStyle/>
+          <a:p>
+            <a:pPr algn="ctr"/>
+            <a:r>
+              <a:rPr sz="800" b="1"/>
+              <a:t>2019</a:t>
+            </a:r>
+          </a:p>
+        </p:txBody>
+      </p:sp>
+      <p:sp>
+        <p:nvSpPr>
+          <p:cNvPr id="6" name="TextBox 5"/>
+          <p:cNvSpPr txBox="1"/>
+          <p:nvPr/>
+        </p:nvSpPr>
+        <p:spPr>
+          <a:xfrm>
+            <a:off x="3346704" y="3520440"/>
+            <a:ext cx="731520" cy="274320"/>
+          </a:xfrm>
+          <a:prstGeom prst="rect">
+            <a:avLst/>
+          </a:prstGeom>
+          <a:noFill/>
+        </p:spPr>
+        <p:txBody>
+          <a:bodyPr wrap="none">
+            <a:spAutoFit/>
+          </a:bodyPr>
+          <a:lstStyle/>
+          <a:p>
+            <a:pPr algn="ctr"/>
+            <a:r>
+              <a:rPr sz="800" b="1"/>
+              <a:t>2020</a:t>
+            </a:r>
+          </a:p>
+        </p:txBody>
+      </p:sp>
+      <p:sp>
+        <p:nvSpPr>
+          <p:cNvPr id="7" name="TextBox 6"/>
+          <p:cNvSpPr txBox="1"/>
+          <p:nvPr/>
+        </p:nvSpPr>
+        <p:spPr>
+          <a:xfrm>
+            <a:off x="4471416" y="3520440"/>
+            <a:ext cx="731520" cy="274320"/>
+          </a:xfrm>
+          <a:prstGeom prst="rect">
+            <a:avLst/>
+          </a:prstGeom>
+          <a:noFill/>
+        </p:spPr>
+        <p:txBody>
+          <a:bodyPr wrap="none">
+            <a:spAutoFit/>
+          </a:bodyPr>
+          <a:lstStyle/>
+          <a:p>
+            <a:pPr algn="ctr"/>
+            <a:r>
+              <a:rPr sz="800" b="1"/>
+              <a:t>2021</a:t>
+            </a:r>
+          </a:p>
+        </p:txBody>
+      </p:sp>
+      <p:sp>
+        <p:nvSpPr>
+          <p:cNvPr id="8" name="TextBox 7"/>
+          <p:cNvSpPr txBox="1"/>
+          <p:nvPr/>
+        </p:nvSpPr>
+        <p:spPr>
+          <a:xfrm>
+            <a:off x="5596128" y="3520440"/>
+            <a:ext cx="731520" cy="274320"/>
+          </a:xfrm>
+          <a:prstGeom prst="rect">
+            <a:avLst/>
+          </a:prstGeom>
+          <a:noFill/>
+        </p:spPr>
+        <p:txBody>
+          <a:bodyPr wrap="none">
+            <a:spAutoFit/>
+          </a:bodyPr>
+          <a:lstStyle/>
+          <a:p>
+            <a:pPr algn="ctr"/>
+            <a:r>
+              <a:rPr sz="800" b="1"/>
+              <a:t>2022</a:t>
+            </a:r>
+          </a:p>
+        </p:txBody>
+      </p:sp>
+      <p:sp>
+        <p:nvSpPr>
+          <p:cNvPr id="9" name="TextBox 8"/>
+          <p:cNvSpPr txBox="1"/>
+          <p:nvPr/>
+        </p:nvSpPr>
+        <p:spPr>
+          <a:xfrm>
+            <a:off x="6720840" y="3520440"/>
+            <a:ext cx="731520" cy="274320"/>
+          </a:xfrm>
+          <a:prstGeom prst="rect">
+            <a:avLst/>
+          </a:prstGeom>
+          <a:noFill/>
+        </p:spPr>
+        <p:txBody>
+          <a:bodyPr wrap="none">
+            <a:spAutoFit/>
+          </a:bodyPr>
+          <a:lstStyle/>
+          <a:p>
+            <a:pPr algn="ctr"/>
+            <a:r>
+              <a:rPr sz="800" b="1"/>
+              <a:t>2023</a:t>
+            </a:r>
+          </a:p>
+        </p:txBody>
+      </p:sp>
+      <p:sp>
+        <p:nvSpPr>
+          <p:cNvPr id="10" name="TextBox 9"/>
+          <p:cNvSpPr txBox="1"/>
+          <p:nvPr/>
+        </p:nvSpPr>
+        <p:spPr>
+          <a:xfrm>
+            <a:off x="7845552" y="3520440"/>
+            <a:ext cx="731520" cy="274320"/>
+          </a:xfrm>
+          <a:prstGeom prst="rect">
+            <a:avLst/>
+          </a:prstGeom>
+          <a:noFill/>
+        </p:spPr>
+        <p:txBody>
+          <a:bodyPr wrap="none">
+            <a:spAutoFit/>
+          </a:bodyPr>
+          <a:lstStyle/>
+          <a:p>
+            <a:pPr algn="ctr"/>
+            <a:r>
+              <a:rPr sz="800" b="1"/>
+              <a:t>2024</a:t>
+            </a:r>
+          </a:p>
+        </p:txBody>
+      </p:sp>
+      <p:sp>
+        <p:nvSpPr>
+          <p:cNvPr id="11" name="TextBox 10"/>
+          <p:cNvSpPr txBox="1"/>
+          <p:nvPr/>
+        </p:nvSpPr>
+        <p:spPr>
+          <a:xfrm>
+            <a:off x="8970263" y="3520440"/>
+            <a:ext cx="731520" cy="274320"/>
+          </a:xfrm>
+          <a:prstGeom prst="rect">
+            <a:avLst/>
+          </a:prstGeom>
+          <a:noFill/>
+        </p:spPr>
+        <p:txBody>
+          <a:bodyPr wrap="none">
+            <a:spAutoFit/>
+          </a:bodyPr>
+          <a:lstStyle/>
+          <a:p>
+            <a:pPr algn="ctr"/>
+            <a:r>
+              <a:rPr sz="800" b="1"/>
+              <a:t>2025</a:t>
+            </a:r>
+          </a:p>
+        </p:txBody>
+      </p:sp>
+      <p:sp>
+        <p:nvSpPr>
+          <p:cNvPr id="12" name="TextBox 11"/>
+          <p:cNvSpPr txBox="1"/>
+          <p:nvPr/>
+        </p:nvSpPr>
+        <p:spPr>
+          <a:xfrm>
+            <a:off x="10094976" y="3520440"/>
+            <a:ext cx="731520" cy="274320"/>
+          </a:xfrm>
+          <a:prstGeom prst="rect">
+            <a:avLst/>
+          </a:prstGeom>
+          <a:noFill/>
+        </p:spPr>
+        <p:txBody>
+          <a:bodyPr wrap="none">
+            <a:spAutoFit/>
+          </a:bodyPr>
+          <a:lstStyle/>
+          <a:p>
+            <a:pPr algn="ctr"/>
+            <a:r>
+              <a:rPr sz="800" b="1"/>
+              <a:t>2026</a:t>
+            </a:r>
+          </a:p>
+        </p:txBody>
+      </p:sp>
+      <p:sp>
+        <p:nvSpPr>
+          <p:cNvPr id="13" name="TextBox 12"/>
+          <p:cNvSpPr txBox="1"/>
+          <p:nvPr/>
+        </p:nvSpPr>
+        <p:spPr>
+          <a:xfrm>
+            <a:off x="182880" y="1371600"/>
+            <a:ext cx="1371600" cy="457200"/>
+          </a:xfrm>
+          <a:prstGeom prst="rect">
+            <a:avLst/>
+          </a:prstGeom>
+          <a:noFill/>
+        </p:spPr>
+        <p:txBody>
+          <a:bodyPr wrap="none">
+            <a:spAutoFit/>
+          </a:bodyPr>
+          <a:lstStyle/>
+          <a:p>
+            <a:r>
+              <a:rPr sz="900" b="1">
+                <a:solidFill>
+                  <a:srgbClr val="1B3A5C"/>
+                </a:solidFill>
+              </a:rPr>
+              <a:t>WADA
+Regulatory
+Updates</a:t>
+            </a:r>
+          </a:p>
+        </p:txBody>
+      </p:sp>
+      <p:sp>
+        <p:nvSpPr>
+          <p:cNvPr id="14" name="Rounded Rectangle 13"/>
+          <p:cNvSpPr/>
+          <p:nvPr/>
+        </p:nvSpPr>
+        <p:spPr>
+          <a:xfrm>
+            <a:off x="5596128" y="1371600"/>
+            <a:ext cx="1645920" cy="640080"/>
+          </a:xfrm>
+          <a:prstGeom prst="roundRect">
+            <a:avLst/>
+          </a:prstGeom>
+          <a:solidFill>
+            <a:srgbClr val="E3F2FD"/>
+          </a:solidFill>
+          <a:ln w="19050">
+            <a:solidFill>
+              <a:srgbClr val="1565C0"/>
+            </a:solidFill>
+          </a:ln>
+        </p:spPr>
+        <p:style>
+          <a:lnRef idx="1">
+            <a:schemeClr val="accent1"/>
+          </a:lnRef>
+          <a:fillRef idx="3">
+            <a:schemeClr val="accent1"/>
+          </a:fillRef>
+          <a:effectRef idx="2">
+            <a:schemeClr val="accent1"/>
+          </a:effectRef>
+          <a:fontRef idx="minor">
+            <a:schemeClr val="lt1"/>
+          </a:fontRef>
+        </p:style>
+        <p:txBody>
+          <a:bodyPr rtlCol="0" anchor="ctr" wrap="square" tIns="50800" bIns="50800"/>
+          <a:lstStyle/>
+          <a:p>
+            <a:pPr algn="ctr">
+              <a:spcBef>
+                <a:spcPts val="0"/>
+              </a:spcBef>
+              <a:spcAft>
+                <a:spcPts val="0"/>
+              </a:spcAft>
+            </a:pPr>
+            <a:r>
+              <a:rPr sz="700" b="0">
+                <a:solidFill>
+                  <a:srgbClr val="424242"/>
+                </a:solidFill>
+              </a:rPr>
+              <a:t>GC intra-articular
+prohibited IC</a:t>
+            </a:r>
+          </a:p>
+        </p:txBody>
+      </p:sp>
+      <p:sp>
+        <p:nvSpPr>
+          <p:cNvPr id="15" name="Rounded Rectangle 14"/>
+          <p:cNvSpPr/>
+          <p:nvPr/>
+        </p:nvSpPr>
+        <p:spPr>
+          <a:xfrm>
+            <a:off x="7620609" y="2194560"/>
+            <a:ext cx="1645920" cy="640080"/>
+          </a:xfrm>
+          <a:prstGeom prst="roundRect">
+            <a:avLst/>
+          </a:prstGeom>
+          <a:solidFill>
+            <a:srgbClr val="E3F2FD"/>
+          </a:solidFill>
+          <a:ln w="19050">
+            <a:solidFill>
+              <a:srgbClr val="1565C0"/>
+            </a:solidFill>
+          </a:ln>
+        </p:spPr>
+        <p:style>
+          <a:lnRef idx="1">
+            <a:schemeClr val="accent1"/>
+          </a:lnRef>
+          <a:fillRef idx="3">
+            <a:schemeClr val="accent1"/>
+          </a:fillRef>
+          <a:effectRef idx="2">
+            <a:schemeClr val="accent1"/>
+          </a:effectRef>
+          <a:fontRef idx="minor">
+            <a:schemeClr val="lt1"/>
+          </a:fontRef>
+        </p:style>
+        <p:txBody>
+          <a:bodyPr rtlCol="0" anchor="ctr" wrap="square" tIns="50800" bIns="50800"/>
+          <a:lstStyle/>
+          <a:p>
+            <a:pPr algn="ctr">
+              <a:spcBef>
+                <a:spcPts val="0"/>
+              </a:spcBef>
+              <a:spcAft>
+                <a:spcPts val="0"/>
+              </a:spcAft>
+            </a:pPr>
+            <a:r>
+              <a:rPr sz="700" b="0">
+                <a:solidFill>
+                  <a:srgbClr val="424242"/>
+                </a:solidFill>
+              </a:rPr>
+              <a:t>Diabetes TUE
+Guideline v5.1</a:t>
+            </a:r>
+          </a:p>
+        </p:txBody>
+      </p:sp>
+      <p:sp>
+        <p:nvSpPr>
+          <p:cNvPr id="16" name="Rounded Rectangle 15"/>
+          <p:cNvSpPr/>
+          <p:nvPr/>
+        </p:nvSpPr>
+        <p:spPr>
+          <a:xfrm>
+            <a:off x="7845552" y="1371600"/>
+            <a:ext cx="1645920" cy="640080"/>
+          </a:xfrm>
+          <a:prstGeom prst="roundRect">
+            <a:avLst/>
+          </a:prstGeom>
+          <a:solidFill>
+            <a:srgbClr val="E3F2FD"/>
+          </a:solidFill>
+          <a:ln w="19050">
+            <a:solidFill>
+              <a:srgbClr val="1565C0"/>
+            </a:solidFill>
+          </a:ln>
+        </p:spPr>
+        <p:style>
+          <a:lnRef idx="1">
+            <a:schemeClr val="accent1"/>
+          </a:lnRef>
+          <a:fillRef idx="3">
+            <a:schemeClr val="accent1"/>
+          </a:fillRef>
+          <a:effectRef idx="2">
+            <a:schemeClr val="accent1"/>
+          </a:effectRef>
+          <a:fontRef idx="minor">
+            <a:schemeClr val="lt1"/>
+          </a:fontRef>
+        </p:style>
+        <p:txBody>
+          <a:bodyPr rtlCol="0" anchor="ctr" wrap="square" tIns="50800" bIns="50800"/>
+          <a:lstStyle/>
+          <a:p>
+            <a:pPr algn="ctr">
+              <a:spcBef>
+                <a:spcPts val="0"/>
+              </a:spcBef>
+              <a:spcAft>
+                <a:spcPts val="0"/>
+              </a:spcAft>
+            </a:pPr>
+            <a:r>
+              <a:rPr sz="700" b="0">
+                <a:solidFill>
+                  <a:srgbClr val="424242"/>
+                </a:solidFill>
+              </a:rPr>
+              <a:t>GLP-1 RA
+Monitoring</a:t>
+            </a:r>
+          </a:p>
+        </p:txBody>
+      </p:sp>
+      <p:sp>
+        <p:nvSpPr>
+          <p:cNvPr id="17" name="Rounded Rectangle 16"/>
+          <p:cNvSpPr/>
+          <p:nvPr/>
+        </p:nvSpPr>
+        <p:spPr>
+          <a:xfrm>
+            <a:off x="8970263" y="2194560"/>
+            <a:ext cx="1645920" cy="640080"/>
+          </a:xfrm>
+          <a:prstGeom prst="roundRect">
+            <a:avLst/>
+          </a:prstGeom>
+          <a:solidFill>
+            <a:srgbClr val="E3F2FD"/>
+          </a:solidFill>
+          <a:ln w="19050">
+            <a:solidFill>
+              <a:srgbClr val="1565C0"/>
+            </a:solidFill>
+          </a:ln>
+        </p:spPr>
+        <p:style>
+          <a:lnRef idx="1">
+            <a:schemeClr val="accent1"/>
+          </a:lnRef>
+          <a:fillRef idx="3">
+            <a:schemeClr val="accent1"/>
+          </a:fillRef>
+          <a:effectRef idx="2">
+            <a:schemeClr val="accent1"/>
+          </a:effectRef>
+          <a:fontRef idx="minor">
+            <a:schemeClr val="lt1"/>
+          </a:fontRef>
+        </p:style>
+        <p:txBody>
+          <a:bodyPr rtlCol="0" anchor="ctr" wrap="square" tIns="50800" bIns="50800"/>
+          <a:lstStyle/>
+          <a:p>
+            <a:pPr algn="ctr">
+              <a:spcBef>
+                <a:spcPts val="0"/>
+              </a:spcBef>
+              <a:spcAft>
+                <a:spcPts val="0"/>
+              </a:spcAft>
+            </a:pPr>
+            <a:r>
+              <a:rPr sz="700" b="0">
+                <a:solidFill>
+                  <a:srgbClr val="424242"/>
+                </a:solidFill>
+              </a:rPr>
+              <a:t>PCOS TUE GL v2.0
+Hypogonadism update</a:t>
+            </a:r>
+          </a:p>
+        </p:txBody>
+      </p:sp>
+      <p:sp>
+        <p:nvSpPr>
+          <p:cNvPr id="18" name="Rounded Rectangle 17"/>
+          <p:cNvSpPr/>
+          <p:nvPr/>
+        </p:nvSpPr>
+        <p:spPr>
+          <a:xfrm>
+            <a:off x="10094976" y="1371600"/>
+            <a:ext cx="1645920" cy="640080"/>
+          </a:xfrm>
+          <a:prstGeom prst="roundRect">
+            <a:avLst/>
+          </a:prstGeom>
+          <a:solidFill>
+            <a:srgbClr val="E3F2FD"/>
+          </a:solidFill>
+          <a:ln w="19050">
+            <a:solidFill>
+              <a:srgbClr val="1565C0"/>
+            </a:solidFill>
+          </a:ln>
+        </p:spPr>
+        <p:style>
+          <a:lnRef idx="1">
+            <a:schemeClr val="accent1"/>
+          </a:lnRef>
+          <a:fillRef idx="3">
+            <a:schemeClr val="accent1"/>
+          </a:fillRef>
+          <a:effectRef idx="2">
+            <a:schemeClr val="accent1"/>
+          </a:effectRef>
+          <a:fontRef idx="minor">
+            <a:schemeClr val="lt1"/>
+          </a:fontRef>
+        </p:style>
+        <p:txBody>
+          <a:bodyPr rtlCol="0" anchor="ctr" wrap="square" tIns="50800" bIns="50800"/>
+          <a:lstStyle/>
+          <a:p>
+            <a:pPr algn="ctr">
+              <a:spcBef>
+                <a:spcPts val="0"/>
+              </a:spcBef>
+              <a:spcAft>
+                <a:spcPts val="0"/>
+              </a:spcAft>
+            </a:pPr>
+            <a:r>
+              <a:rPr sz="700" b="0">
+                <a:solidFill>
+                  <a:srgbClr val="424242"/>
+                </a:solidFill>
+              </a:rPr>
+              <a:t>Asthma TUE v9.3
+ADHD TUE v8.0</a:t>
+            </a:r>
+          </a:p>
+        </p:txBody>
+      </p:sp>
+      <p:sp>
+        <p:nvSpPr>
+          <p:cNvPr id="19" name="TextBox 18"/>
+          <p:cNvSpPr txBox="1"/>
+          <p:nvPr/>
+        </p:nvSpPr>
+        <p:spPr>
+          <a:xfrm>
+            <a:off x="182880" y="4389120"/>
+            <a:ext cx="1371600" cy="457200"/>
+          </a:xfrm>
+          <a:prstGeom prst="rect">
+            <a:avLst/>
+          </a:prstGeom>
+          <a:noFill/>
+        </p:spPr>
+        <p:txBody>
+          <a:bodyPr wrap="none">
+            <a:spAutoFit/>
+          </a:bodyPr>
+          <a:lstStyle/>
+          <a:p>
+            <a:r>
+              <a:rPr sz="900" b="1">
+                <a:solidFill>
+                  <a:srgbClr val="2E7D32"/>
+                </a:solidFill>
+              </a:rPr>
+              <a:t>Clinical
+Guideline
+Updates</a:t>
+            </a:r>
+          </a:p>
+        </p:txBody>
+      </p:sp>
+      <p:sp>
+        <p:nvSpPr>
+          <p:cNvPr id="20" name="Rounded Rectangle 19"/>
+          <p:cNvSpPr/>
+          <p:nvPr/>
+        </p:nvSpPr>
+        <p:spPr>
+          <a:xfrm>
+            <a:off x="1659636" y="4114800"/>
+            <a:ext cx="1645920" cy="640080"/>
+          </a:xfrm>
+          <a:prstGeom prst="roundRect">
+            <a:avLst/>
+          </a:prstGeom>
+          <a:solidFill>
+            <a:srgbClr val="E8F5E9"/>
+          </a:solidFill>
+          <a:ln w="19050">
+            <a:solidFill>
+              <a:srgbClr val="2E7D32"/>
+            </a:solidFill>
+          </a:ln>
+        </p:spPr>
+        <p:style>
+          <a:lnRef idx="1">
+            <a:schemeClr val="accent1"/>
+          </a:lnRef>
+          <a:fillRef idx="3">
+            <a:schemeClr val="accent1"/>
+          </a:fillRef>
+          <a:effectRef idx="2">
+            <a:schemeClr val="accent1"/>
+          </a:effectRef>
+          <a:fontRef idx="minor">
+            <a:schemeClr val="lt1"/>
+          </a:fontRef>
+        </p:style>
+        <p:txBody>
+          <a:bodyPr rtlCol="0" anchor="ctr" wrap="square" tIns="50800" bIns="50800"/>
+          <a:lstStyle/>
+          <a:p>
+            <a:pPr algn="ctr">
+              <a:spcBef>
+                <a:spcPts val="0"/>
+              </a:spcBef>
+              <a:spcAft>
+                <a:spcPts val="0"/>
+              </a:spcAft>
+            </a:pPr>
+            <a:r>
+              <a:rPr sz="700" b="0">
+                <a:solidFill>
+                  <a:srgbClr val="424242"/>
+                </a:solidFill>
+              </a:rPr>
+              <a:t>Endocrine Soc.
+Testosterone GL</a:t>
+            </a:r>
+          </a:p>
+        </p:txBody>
+      </p:sp>
+      <p:sp>
+        <p:nvSpPr>
+          <p:cNvPr id="21" name="Rounded Rectangle 20"/>
+          <p:cNvSpPr/>
+          <p:nvPr/>
+        </p:nvSpPr>
+        <p:spPr>
+          <a:xfrm>
+            <a:off x="5596128" y="4937760"/>
+            <a:ext cx="1645920" cy="640080"/>
+          </a:xfrm>
+          <a:prstGeom prst="roundRect">
+            <a:avLst/>
+          </a:prstGeom>
+          <a:solidFill>
+            <a:srgbClr val="E8F5E9"/>
+          </a:solidFill>
+          <a:ln w="19050">
+            <a:solidFill>
+              <a:srgbClr val="2E7D32"/>
+            </a:solidFill>
+          </a:ln>
+        </p:spPr>
+        <p:style>
+          <a:lnRef idx="1">
+            <a:schemeClr val="accent1"/>
+          </a:lnRef>
+          <a:fillRef idx="3">
+            <a:schemeClr val="accent1"/>
+          </a:fillRef>
+          <a:effectRef idx="2">
+            <a:schemeClr val="accent1"/>
+          </a:effectRef>
+          <a:fontRef idx="minor">
+            <a:schemeClr val="lt1"/>
+          </a:fontRef>
+        </p:style>
+        <p:txBody>
+          <a:bodyPr rtlCol="0" anchor="ctr" wrap="square" tIns="50800" bIns="50800"/>
+          <a:lstStyle/>
+          <a:p>
+            <a:pPr algn="ctr">
+              <a:spcBef>
+                <a:spcPts val="0"/>
+              </a:spcBef>
+              <a:spcAft>
+                <a:spcPts val="0"/>
+              </a:spcAft>
+            </a:pPr>
+            <a:r>
+              <a:rPr sz="700" b="0">
+                <a:solidFill>
+                  <a:srgbClr val="424242"/>
+                </a:solidFill>
+              </a:rPr>
+              <a:t>Australian
+ADHD GL</a:t>
+            </a:r>
+          </a:p>
+        </p:txBody>
+      </p:sp>
+      <p:sp>
+        <p:nvSpPr>
+          <p:cNvPr id="22" name="Rounded Rectangle 21"/>
+          <p:cNvSpPr/>
+          <p:nvPr/>
+        </p:nvSpPr>
+        <p:spPr>
+          <a:xfrm>
+            <a:off x="7283196" y="4114800"/>
+            <a:ext cx="1645920" cy="640080"/>
+          </a:xfrm>
+          <a:prstGeom prst="roundRect">
+            <a:avLst/>
+          </a:prstGeom>
+          <a:solidFill>
+            <a:srgbClr val="E8F5E9"/>
+          </a:solidFill>
+          <a:ln w="19050">
+            <a:solidFill>
+              <a:srgbClr val="2E7D32"/>
+            </a:solidFill>
+          </a:ln>
+        </p:spPr>
+        <p:style>
+          <a:lnRef idx="1">
+            <a:schemeClr val="accent1"/>
+          </a:lnRef>
+          <a:fillRef idx="3">
+            <a:schemeClr val="accent1"/>
+          </a:fillRef>
+          <a:effectRef idx="2">
+            <a:schemeClr val="accent1"/>
+          </a:effectRef>
+          <a:fontRef idx="minor">
+            <a:schemeClr val="lt1"/>
+          </a:fontRef>
+        </p:style>
+        <p:txBody>
+          <a:bodyPr rtlCol="0" anchor="ctr" wrap="square" tIns="50800" bIns="50800"/>
+          <a:lstStyle/>
+          <a:p>
+            <a:pPr algn="ctr">
+              <a:spcBef>
+                <a:spcPts val="0"/>
+              </a:spcBef>
+              <a:spcAft>
+                <a:spcPts val="0"/>
+              </a:spcAft>
+            </a:pPr>
+            <a:r>
+              <a:rPr sz="700" b="0">
+                <a:solidFill>
+                  <a:srgbClr val="424242"/>
+                </a:solidFill>
+              </a:rPr>
+              <a:t>PCOS Intl GL
+TRAVERSE trial</a:t>
+            </a:r>
+          </a:p>
+        </p:txBody>
+      </p:sp>
+      <p:sp>
+        <p:nvSpPr>
+          <p:cNvPr id="23" name="Rounded Rectangle 22"/>
+          <p:cNvSpPr/>
+          <p:nvPr/>
+        </p:nvSpPr>
+        <p:spPr>
+          <a:xfrm>
+            <a:off x="8407908" y="4937760"/>
+            <a:ext cx="1645920" cy="640080"/>
+          </a:xfrm>
+          <a:prstGeom prst="roundRect">
+            <a:avLst/>
+          </a:prstGeom>
+          <a:solidFill>
+            <a:srgbClr val="E8F5E9"/>
+          </a:solidFill>
+          <a:ln w="19050">
+            <a:solidFill>
+              <a:srgbClr val="2E7D32"/>
+            </a:solidFill>
+          </a:ln>
+        </p:spPr>
+        <p:style>
+          <a:lnRef idx="1">
+            <a:schemeClr val="accent1"/>
+          </a:lnRef>
+          <a:fillRef idx="3">
+            <a:schemeClr val="accent1"/>
+          </a:fillRef>
+          <a:effectRef idx="2">
+            <a:schemeClr val="accent1"/>
+          </a:effectRef>
+          <a:fontRef idx="minor">
+            <a:schemeClr val="lt1"/>
+          </a:fontRef>
+        </p:style>
+        <p:txBody>
+          <a:bodyPr rtlCol="0" anchor="ctr" wrap="square" tIns="50800" bIns="50800"/>
+          <a:lstStyle/>
+          <a:p>
+            <a:pPr algn="ctr">
+              <a:spcBef>
+                <a:spcPts val="0"/>
+              </a:spcBef>
+              <a:spcAft>
+                <a:spcPts val="0"/>
+              </a:spcAft>
+            </a:pPr>
+            <a:r>
+              <a:rPr sz="700" b="0">
+                <a:solidFill>
+                  <a:srgbClr val="424242"/>
+                </a:solidFill>
+              </a:rPr>
+              <a:t>NICE ADHD
+EAU Reprod Health</a:t>
+            </a:r>
+          </a:p>
+        </p:txBody>
+      </p:sp>
+      <p:sp>
+        <p:nvSpPr>
+          <p:cNvPr id="24" name="Rounded Rectangle 23"/>
+          <p:cNvSpPr/>
+          <p:nvPr/>
+        </p:nvSpPr>
+        <p:spPr>
+          <a:xfrm>
+            <a:off x="9420148" y="4114800"/>
+            <a:ext cx="1645920" cy="640080"/>
+          </a:xfrm>
+          <a:prstGeom prst="roundRect">
+            <a:avLst/>
+          </a:prstGeom>
+          <a:solidFill>
+            <a:srgbClr val="E8F5E9"/>
+          </a:solidFill>
+          <a:ln w="19050">
+            <a:solidFill>
+              <a:srgbClr val="2E7D32"/>
+            </a:solidFill>
+          </a:ln>
+        </p:spPr>
+        <p:style>
+          <a:lnRef idx="1">
+            <a:schemeClr val="accent1"/>
+          </a:lnRef>
+          <a:fillRef idx="3">
+            <a:schemeClr val="accent1"/>
+          </a:fillRef>
+          <a:effectRef idx="2">
+            <a:schemeClr val="accent1"/>
+          </a:effectRef>
+          <a:fontRef idx="minor">
+            <a:schemeClr val="lt1"/>
+          </a:fontRef>
+        </p:style>
+        <p:txBody>
+          <a:bodyPr rtlCol="0" anchor="ctr" wrap="square" tIns="50800" bIns="50800"/>
+          <a:lstStyle/>
+          <a:p>
+            <a:pPr algn="ctr">
+              <a:spcBef>
+                <a:spcPts val="0"/>
+              </a:spcBef>
+              <a:spcAft>
+                <a:spcPts val="0"/>
+              </a:spcAft>
+            </a:pPr>
+            <a:r>
+              <a:rPr sz="700" b="0">
+                <a:solidFill>
+                  <a:srgbClr val="424242"/>
+                </a:solidFill>
+              </a:rPr>
+              <a:t>GINA 2025
+ADA Diabetes 2025</a:t>
+            </a:r>
+          </a:p>
+        </p:txBody>
+      </p:sp>
+      <p:sp>
+        <p:nvSpPr>
+          <p:cNvPr id="25" name="TextBox 24"/>
+          <p:cNvSpPr txBox="1"/>
+          <p:nvPr/>
+        </p:nvSpPr>
+        <p:spPr>
+          <a:xfrm>
+            <a:off x="10515600" y="3108960"/>
+            <a:ext cx="914400" cy="640080"/>
+          </a:xfrm>
+          <a:prstGeom prst="rect">
+            <a:avLst/>
+          </a:prstGeom>
+          <a:noFill/>
+        </p:spPr>
+        <p:txBody>
+          <a:bodyPr wrap="none">
+            <a:spAutoFit/>
+          </a:bodyPr>
+          <a:lstStyle/>
+          <a:p>
+            <a:pPr algn="ctr"/>
+            <a:r>
+              <a:rPr sz="1400" b="1">
+                <a:solidFill>
+                  <a:srgbClr val="C62828"/>
+                </a:solidFill>
+              </a:rPr>
+              <a:t>GAP</a:t>
+            </a:r>
+          </a:p>
+        </p:txBody>
+      </p:sp>
+      <p:sp>
+        <p:nvSpPr>
+          <p:cNvPr id="26" name="TextBox 25"/>
+          <p:cNvSpPr txBox="1"/>
+          <p:nvPr/>
+        </p:nvSpPr>
+        <p:spPr>
+          <a:xfrm>
+            <a:off x="457200" y="6217920"/>
+            <a:ext cx="11247120" cy="548640"/>
+          </a:xfrm>
+          <a:prstGeom prst="rect">
+            <a:avLst/>
+          </a:prstGeom>
+          <a:noFill/>
+        </p:spPr>
+        <p:txBody>
           <a:bodyPr wrap="square">
             <a:spAutoFit/>
           </a:bodyPr>
@@ -3166,7 +4166,11 @@
           <a:p>
             <a:pPr algn="ctr"/>
             <a:r>
-              <a:rPr sz="1400" i="1"/>
+              <a:rPr sz="1200" i="1">
+                <a:solidFill>
+                  <a:srgbClr val="424242"/>
+                </a:solidFill>
+              </a:rPr>
               <a:t>Figure 4. Timeline of clinical guideline updates versus WADA TUE regulatory changes (2018–2026).</a:t>
             </a:r>
           </a:p>

--- a/wada-tue-scoping-review/manuscripts/individual_figures/Figure_4.pptx
+++ b/wada-tue-scoping-review/manuscripts/individual_figures/Figure_4.pptx
@@ -3096,8 +3096,8 @@
         </p:nvSpPr>
         <p:spPr>
           <a:xfrm>
-            <a:off x="457200" y="91440"/>
-            <a:ext cx="11247120" cy="548640"/>
+            <a:off x="457200" y="137160"/>
+            <a:ext cx="11247120" cy="640080"/>
           </a:xfrm>
           <a:prstGeom prst="rect">
             <a:avLst/>
@@ -3112,7 +3112,7 @@
           <a:p>
             <a:pPr algn="ctr"/>
             <a:r>
-              <a:rPr b="1" sz="2000">
+              <a:rPr b="1" sz="1800">
                 <a:solidFill>
                   <a:srgbClr val="1B3A5C"/>
                 </a:solidFill>
@@ -3131,13 +3131,13 @@
         </p:nvCxnSpPr>
         <p:spPr>
           <a:xfrm>
-            <a:off x="914400" y="3429000"/>
-            <a:ext cx="10332720" cy="0"/>
+            <a:off x="1371600" y="3429000"/>
+            <a:ext cx="9601200" cy="0"/>
           </a:xfrm>
           <a:prstGeom prst="line">
             <a:avLst/>
           </a:prstGeom>
-          <a:ln w="25400">
+          <a:ln w="31750">
             <a:solidFill>
               <a:srgbClr val="424242"/>
             </a:solidFill>
@@ -3160,14 +3160,57 @@
       </p:cxnSp>
       <p:sp>
         <p:nvSpPr>
-          <p:cNvPr id="4" name="TextBox 3"/>
+          <p:cNvPr id="4" name="Oval 3"/>
+          <p:cNvSpPr/>
+          <p:nvPr/>
+        </p:nvSpPr>
+        <p:spPr>
+          <a:xfrm>
+            <a:off x="1499616" y="3374136"/>
+            <a:ext cx="109728" cy="109728"/>
+          </a:xfrm>
+          <a:prstGeom prst="ellipse">
+            <a:avLst/>
+          </a:prstGeom>
+          <a:solidFill>
+            <a:srgbClr val="424242"/>
+          </a:solidFill>
+          <a:ln>
+            <a:noFill/>
+          </a:ln>
+        </p:spPr>
+        <p:style>
+          <a:lnRef idx="1">
+            <a:schemeClr val="accent1"/>
+          </a:lnRef>
+          <a:fillRef idx="3">
+            <a:schemeClr val="accent1"/>
+          </a:fillRef>
+          <a:effectRef idx="2">
+            <a:schemeClr val="accent1"/>
+          </a:effectRef>
+          <a:fontRef idx="minor">
+            <a:schemeClr val="lt1"/>
+          </a:fontRef>
+        </p:style>
+        <p:txBody>
+          <a:bodyPr rtlCol="0" anchor="ctr"/>
+          <a:lstStyle/>
+          <a:p>
+            <a:pPr algn="ctr"/>
+          </a:p>
+        </p:txBody>
+      </p:sp>
+      <p:sp>
+        <p:nvSpPr>
+          <p:cNvPr id="5" name="TextBox 4"/>
           <p:cNvSpPr txBox="1"/>
           <p:nvPr/>
         </p:nvSpPr>
         <p:spPr>
           <a:xfrm>
-            <a:off x="1097280" y="3520440"/>
-            <a:ext cx="731520" cy="274320"/>
+            <a:off x="1280160" y="3566160"/>
+            <a:ext cx="548640" cy="228600"/>
           </a:xfrm>
           <a:prstGeom prst="rect">
             <a:avLst/>
@@ -3175,14 +3218,18 @@
           <a:noFill/>
         </p:spPr>
         <p:txBody>
-          <a:bodyPr wrap="none">
+          <a:bodyPr wrap="square">
             <a:spAutoFit/>
           </a:bodyPr>
           <a:lstStyle/>
           <a:p>
             <a:pPr algn="ctr"/>
             <a:r>
-              <a:rPr sz="800" b="1"/>
+              <a:rPr sz="800" b="1" i="0">
+                <a:solidFill>
+                  <a:srgbClr val="424242"/>
+                </a:solidFill>
+              </a:rPr>
               <a:t>2018</a:t>
             </a:r>
           </a:p>
@@ -3190,14 +3237,57 @@
       </p:sp>
       <p:sp>
         <p:nvSpPr>
-          <p:cNvPr id="5" name="TextBox 4"/>
+          <p:cNvPr id="6" name="Oval 5"/>
+          <p:cNvSpPr/>
+          <p:nvPr/>
+        </p:nvSpPr>
+        <p:spPr>
+          <a:xfrm>
+            <a:off x="2505456" y="3374136"/>
+            <a:ext cx="109728" cy="109728"/>
+          </a:xfrm>
+          <a:prstGeom prst="ellipse">
+            <a:avLst/>
+          </a:prstGeom>
+          <a:solidFill>
+            <a:srgbClr val="424242"/>
+          </a:solidFill>
+          <a:ln>
+            <a:noFill/>
+          </a:ln>
+        </p:spPr>
+        <p:style>
+          <a:lnRef idx="1">
+            <a:schemeClr val="accent1"/>
+          </a:lnRef>
+          <a:fillRef idx="3">
+            <a:schemeClr val="accent1"/>
+          </a:fillRef>
+          <a:effectRef idx="2">
+            <a:schemeClr val="accent1"/>
+          </a:effectRef>
+          <a:fontRef idx="minor">
+            <a:schemeClr val="lt1"/>
+          </a:fontRef>
+        </p:style>
+        <p:txBody>
+          <a:bodyPr rtlCol="0" anchor="ctr"/>
+          <a:lstStyle/>
+          <a:p>
+            <a:pPr algn="ctr"/>
+          </a:p>
+        </p:txBody>
+      </p:sp>
+      <p:sp>
+        <p:nvSpPr>
+          <p:cNvPr id="7" name="TextBox 6"/>
           <p:cNvSpPr txBox="1"/>
           <p:nvPr/>
         </p:nvSpPr>
         <p:spPr>
           <a:xfrm>
-            <a:off x="2221991" y="3520440"/>
-            <a:ext cx="731520" cy="274320"/>
+            <a:off x="2286000" y="3566160"/>
+            <a:ext cx="548640" cy="228600"/>
           </a:xfrm>
           <a:prstGeom prst="rect">
             <a:avLst/>
@@ -3205,14 +3295,18 @@
           <a:noFill/>
         </p:spPr>
         <p:txBody>
-          <a:bodyPr wrap="none">
+          <a:bodyPr wrap="square">
             <a:spAutoFit/>
           </a:bodyPr>
           <a:lstStyle/>
           <a:p>
             <a:pPr algn="ctr"/>
             <a:r>
-              <a:rPr sz="800" b="1"/>
+              <a:rPr sz="800" b="1" i="0">
+                <a:solidFill>
+                  <a:srgbClr val="424242"/>
+                </a:solidFill>
+              </a:rPr>
               <a:t>2019</a:t>
             </a:r>
           </a:p>
@@ -3220,14 +3314,57 @@
       </p:sp>
       <p:sp>
         <p:nvSpPr>
-          <p:cNvPr id="6" name="TextBox 5"/>
+          <p:cNvPr id="8" name="Oval 7"/>
+          <p:cNvSpPr/>
+          <p:nvPr/>
+        </p:nvSpPr>
+        <p:spPr>
+          <a:xfrm>
+            <a:off x="3511296" y="3374136"/>
+            <a:ext cx="109728" cy="109728"/>
+          </a:xfrm>
+          <a:prstGeom prst="ellipse">
+            <a:avLst/>
+          </a:prstGeom>
+          <a:solidFill>
+            <a:srgbClr val="424242"/>
+          </a:solidFill>
+          <a:ln>
+            <a:noFill/>
+          </a:ln>
+        </p:spPr>
+        <p:style>
+          <a:lnRef idx="1">
+            <a:schemeClr val="accent1"/>
+          </a:lnRef>
+          <a:fillRef idx="3">
+            <a:schemeClr val="accent1"/>
+          </a:fillRef>
+          <a:effectRef idx="2">
+            <a:schemeClr val="accent1"/>
+          </a:effectRef>
+          <a:fontRef idx="minor">
+            <a:schemeClr val="lt1"/>
+          </a:fontRef>
+        </p:style>
+        <p:txBody>
+          <a:bodyPr rtlCol="0" anchor="ctr"/>
+          <a:lstStyle/>
+          <a:p>
+            <a:pPr algn="ctr"/>
+          </a:p>
+        </p:txBody>
+      </p:sp>
+      <p:sp>
+        <p:nvSpPr>
+          <p:cNvPr id="9" name="TextBox 8"/>
           <p:cNvSpPr txBox="1"/>
           <p:nvPr/>
         </p:nvSpPr>
         <p:spPr>
           <a:xfrm>
-            <a:off x="3346704" y="3520440"/>
-            <a:ext cx="731520" cy="274320"/>
+            <a:off x="3291840" y="3566160"/>
+            <a:ext cx="548640" cy="228600"/>
           </a:xfrm>
           <a:prstGeom prst="rect">
             <a:avLst/>
@@ -3235,14 +3372,18 @@
           <a:noFill/>
         </p:spPr>
         <p:txBody>
-          <a:bodyPr wrap="none">
+          <a:bodyPr wrap="square">
             <a:spAutoFit/>
           </a:bodyPr>
           <a:lstStyle/>
           <a:p>
             <a:pPr algn="ctr"/>
             <a:r>
-              <a:rPr sz="800" b="1"/>
+              <a:rPr sz="800" b="1" i="0">
+                <a:solidFill>
+                  <a:srgbClr val="424242"/>
+                </a:solidFill>
+              </a:rPr>
               <a:t>2020</a:t>
             </a:r>
           </a:p>
@@ -3250,14 +3391,57 @@
       </p:sp>
       <p:sp>
         <p:nvSpPr>
-          <p:cNvPr id="7" name="TextBox 6"/>
+          <p:cNvPr id="10" name="Oval 9"/>
+          <p:cNvSpPr/>
+          <p:nvPr/>
+        </p:nvSpPr>
+        <p:spPr>
+          <a:xfrm>
+            <a:off x="4517136" y="3374136"/>
+            <a:ext cx="109728" cy="109728"/>
+          </a:xfrm>
+          <a:prstGeom prst="ellipse">
+            <a:avLst/>
+          </a:prstGeom>
+          <a:solidFill>
+            <a:srgbClr val="424242"/>
+          </a:solidFill>
+          <a:ln>
+            <a:noFill/>
+          </a:ln>
+        </p:spPr>
+        <p:style>
+          <a:lnRef idx="1">
+            <a:schemeClr val="accent1"/>
+          </a:lnRef>
+          <a:fillRef idx="3">
+            <a:schemeClr val="accent1"/>
+          </a:fillRef>
+          <a:effectRef idx="2">
+            <a:schemeClr val="accent1"/>
+          </a:effectRef>
+          <a:fontRef idx="minor">
+            <a:schemeClr val="lt1"/>
+          </a:fontRef>
+        </p:style>
+        <p:txBody>
+          <a:bodyPr rtlCol="0" anchor="ctr"/>
+          <a:lstStyle/>
+          <a:p>
+            <a:pPr algn="ctr"/>
+          </a:p>
+        </p:txBody>
+      </p:sp>
+      <p:sp>
+        <p:nvSpPr>
+          <p:cNvPr id="11" name="TextBox 10"/>
           <p:cNvSpPr txBox="1"/>
           <p:nvPr/>
         </p:nvSpPr>
         <p:spPr>
           <a:xfrm>
-            <a:off x="4471416" y="3520440"/>
-            <a:ext cx="731520" cy="274320"/>
+            <a:off x="4297680" y="3566160"/>
+            <a:ext cx="548640" cy="228600"/>
           </a:xfrm>
           <a:prstGeom prst="rect">
             <a:avLst/>
@@ -3265,14 +3449,18 @@
           <a:noFill/>
         </p:spPr>
         <p:txBody>
-          <a:bodyPr wrap="none">
+          <a:bodyPr wrap="square">
             <a:spAutoFit/>
           </a:bodyPr>
           <a:lstStyle/>
           <a:p>
             <a:pPr algn="ctr"/>
             <a:r>
-              <a:rPr sz="800" b="1"/>
+              <a:rPr sz="800" b="1" i="0">
+                <a:solidFill>
+                  <a:srgbClr val="424242"/>
+                </a:solidFill>
+              </a:rPr>
               <a:t>2021</a:t>
             </a:r>
           </a:p>
@@ -3280,14 +3468,57 @@
       </p:sp>
       <p:sp>
         <p:nvSpPr>
-          <p:cNvPr id="8" name="TextBox 7"/>
+          <p:cNvPr id="12" name="Oval 11"/>
+          <p:cNvSpPr/>
+          <p:nvPr/>
+        </p:nvSpPr>
+        <p:spPr>
+          <a:xfrm>
+            <a:off x="5522976" y="3374136"/>
+            <a:ext cx="109728" cy="109728"/>
+          </a:xfrm>
+          <a:prstGeom prst="ellipse">
+            <a:avLst/>
+          </a:prstGeom>
+          <a:solidFill>
+            <a:srgbClr val="424242"/>
+          </a:solidFill>
+          <a:ln>
+            <a:noFill/>
+          </a:ln>
+        </p:spPr>
+        <p:style>
+          <a:lnRef idx="1">
+            <a:schemeClr val="accent1"/>
+          </a:lnRef>
+          <a:fillRef idx="3">
+            <a:schemeClr val="accent1"/>
+          </a:fillRef>
+          <a:effectRef idx="2">
+            <a:schemeClr val="accent1"/>
+          </a:effectRef>
+          <a:fontRef idx="minor">
+            <a:schemeClr val="lt1"/>
+          </a:fontRef>
+        </p:style>
+        <p:txBody>
+          <a:bodyPr rtlCol="0" anchor="ctr"/>
+          <a:lstStyle/>
+          <a:p>
+            <a:pPr algn="ctr"/>
+          </a:p>
+        </p:txBody>
+      </p:sp>
+      <p:sp>
+        <p:nvSpPr>
+          <p:cNvPr id="13" name="TextBox 12"/>
           <p:cNvSpPr txBox="1"/>
           <p:nvPr/>
         </p:nvSpPr>
         <p:spPr>
           <a:xfrm>
-            <a:off x="5596128" y="3520440"/>
-            <a:ext cx="731520" cy="274320"/>
+            <a:off x="5303520" y="3566160"/>
+            <a:ext cx="548640" cy="228600"/>
           </a:xfrm>
           <a:prstGeom prst="rect">
             <a:avLst/>
@@ -3295,14 +3526,18 @@
           <a:noFill/>
         </p:spPr>
         <p:txBody>
-          <a:bodyPr wrap="none">
+          <a:bodyPr wrap="square">
             <a:spAutoFit/>
           </a:bodyPr>
           <a:lstStyle/>
           <a:p>
             <a:pPr algn="ctr"/>
             <a:r>
-              <a:rPr sz="800" b="1"/>
+              <a:rPr sz="800" b="1" i="0">
+                <a:solidFill>
+                  <a:srgbClr val="424242"/>
+                </a:solidFill>
+              </a:rPr>
               <a:t>2022</a:t>
             </a:r>
           </a:p>
@@ -3310,14 +3545,57 @@
       </p:sp>
       <p:sp>
         <p:nvSpPr>
-          <p:cNvPr id="9" name="TextBox 8"/>
+          <p:cNvPr id="14" name="Oval 13"/>
+          <p:cNvSpPr/>
+          <p:nvPr/>
+        </p:nvSpPr>
+        <p:spPr>
+          <a:xfrm>
+            <a:off x="6528816" y="3374136"/>
+            <a:ext cx="109728" cy="109728"/>
+          </a:xfrm>
+          <a:prstGeom prst="ellipse">
+            <a:avLst/>
+          </a:prstGeom>
+          <a:solidFill>
+            <a:srgbClr val="424242"/>
+          </a:solidFill>
+          <a:ln>
+            <a:noFill/>
+          </a:ln>
+        </p:spPr>
+        <p:style>
+          <a:lnRef idx="1">
+            <a:schemeClr val="accent1"/>
+          </a:lnRef>
+          <a:fillRef idx="3">
+            <a:schemeClr val="accent1"/>
+          </a:fillRef>
+          <a:effectRef idx="2">
+            <a:schemeClr val="accent1"/>
+          </a:effectRef>
+          <a:fontRef idx="minor">
+            <a:schemeClr val="lt1"/>
+          </a:fontRef>
+        </p:style>
+        <p:txBody>
+          <a:bodyPr rtlCol="0" anchor="ctr"/>
+          <a:lstStyle/>
+          <a:p>
+            <a:pPr algn="ctr"/>
+          </a:p>
+        </p:txBody>
+      </p:sp>
+      <p:sp>
+        <p:nvSpPr>
+          <p:cNvPr id="15" name="TextBox 14"/>
           <p:cNvSpPr txBox="1"/>
           <p:nvPr/>
         </p:nvSpPr>
         <p:spPr>
           <a:xfrm>
-            <a:off x="6720840" y="3520440"/>
-            <a:ext cx="731520" cy="274320"/>
+            <a:off x="6309360" y="3566160"/>
+            <a:ext cx="548640" cy="228600"/>
           </a:xfrm>
           <a:prstGeom prst="rect">
             <a:avLst/>
@@ -3325,14 +3603,18 @@
           <a:noFill/>
         </p:spPr>
         <p:txBody>
-          <a:bodyPr wrap="none">
+          <a:bodyPr wrap="square">
             <a:spAutoFit/>
           </a:bodyPr>
           <a:lstStyle/>
           <a:p>
             <a:pPr algn="ctr"/>
             <a:r>
-              <a:rPr sz="800" b="1"/>
+              <a:rPr sz="800" b="1" i="0">
+                <a:solidFill>
+                  <a:srgbClr val="424242"/>
+                </a:solidFill>
+              </a:rPr>
               <a:t>2023</a:t>
             </a:r>
           </a:p>
@@ -3340,14 +3622,57 @@
       </p:sp>
       <p:sp>
         <p:nvSpPr>
-          <p:cNvPr id="10" name="TextBox 9"/>
+          <p:cNvPr id="16" name="Oval 15"/>
+          <p:cNvSpPr/>
+          <p:nvPr/>
+        </p:nvSpPr>
+        <p:spPr>
+          <a:xfrm>
+            <a:off x="7534656" y="3374136"/>
+            <a:ext cx="109728" cy="109728"/>
+          </a:xfrm>
+          <a:prstGeom prst="ellipse">
+            <a:avLst/>
+          </a:prstGeom>
+          <a:solidFill>
+            <a:srgbClr val="424242"/>
+          </a:solidFill>
+          <a:ln>
+            <a:noFill/>
+          </a:ln>
+        </p:spPr>
+        <p:style>
+          <a:lnRef idx="1">
+            <a:schemeClr val="accent1"/>
+          </a:lnRef>
+          <a:fillRef idx="3">
+            <a:schemeClr val="accent1"/>
+          </a:fillRef>
+          <a:effectRef idx="2">
+            <a:schemeClr val="accent1"/>
+          </a:effectRef>
+          <a:fontRef idx="minor">
+            <a:schemeClr val="lt1"/>
+          </a:fontRef>
+        </p:style>
+        <p:txBody>
+          <a:bodyPr rtlCol="0" anchor="ctr"/>
+          <a:lstStyle/>
+          <a:p>
+            <a:pPr algn="ctr"/>
+          </a:p>
+        </p:txBody>
+      </p:sp>
+      <p:sp>
+        <p:nvSpPr>
+          <p:cNvPr id="17" name="TextBox 16"/>
           <p:cNvSpPr txBox="1"/>
           <p:nvPr/>
         </p:nvSpPr>
         <p:spPr>
           <a:xfrm>
-            <a:off x="7845552" y="3520440"/>
-            <a:ext cx="731520" cy="274320"/>
+            <a:off x="7315200" y="3566160"/>
+            <a:ext cx="548640" cy="228600"/>
           </a:xfrm>
           <a:prstGeom prst="rect">
             <a:avLst/>
@@ -3355,14 +3680,18 @@
           <a:noFill/>
         </p:spPr>
         <p:txBody>
-          <a:bodyPr wrap="none">
+          <a:bodyPr wrap="square">
             <a:spAutoFit/>
           </a:bodyPr>
           <a:lstStyle/>
           <a:p>
             <a:pPr algn="ctr"/>
             <a:r>
-              <a:rPr sz="800" b="1"/>
+              <a:rPr sz="800" b="1" i="0">
+                <a:solidFill>
+                  <a:srgbClr val="424242"/>
+                </a:solidFill>
+              </a:rPr>
               <a:t>2024</a:t>
             </a:r>
           </a:p>
@@ -3370,14 +3699,57 @@
       </p:sp>
       <p:sp>
         <p:nvSpPr>
-          <p:cNvPr id="11" name="TextBox 10"/>
+          <p:cNvPr id="18" name="Oval 17"/>
+          <p:cNvSpPr/>
+          <p:nvPr/>
+        </p:nvSpPr>
+        <p:spPr>
+          <a:xfrm>
+            <a:off x="8540496" y="3374136"/>
+            <a:ext cx="109728" cy="109728"/>
+          </a:xfrm>
+          <a:prstGeom prst="ellipse">
+            <a:avLst/>
+          </a:prstGeom>
+          <a:solidFill>
+            <a:srgbClr val="424242"/>
+          </a:solidFill>
+          <a:ln>
+            <a:noFill/>
+          </a:ln>
+        </p:spPr>
+        <p:style>
+          <a:lnRef idx="1">
+            <a:schemeClr val="accent1"/>
+          </a:lnRef>
+          <a:fillRef idx="3">
+            <a:schemeClr val="accent1"/>
+          </a:fillRef>
+          <a:effectRef idx="2">
+            <a:schemeClr val="accent1"/>
+          </a:effectRef>
+          <a:fontRef idx="minor">
+            <a:schemeClr val="lt1"/>
+          </a:fontRef>
+        </p:style>
+        <p:txBody>
+          <a:bodyPr rtlCol="0" anchor="ctr"/>
+          <a:lstStyle/>
+          <a:p>
+            <a:pPr algn="ctr"/>
+          </a:p>
+        </p:txBody>
+      </p:sp>
+      <p:sp>
+        <p:nvSpPr>
+          <p:cNvPr id="19" name="TextBox 18"/>
           <p:cNvSpPr txBox="1"/>
           <p:nvPr/>
         </p:nvSpPr>
         <p:spPr>
           <a:xfrm>
-            <a:off x="8970263" y="3520440"/>
-            <a:ext cx="731520" cy="274320"/>
+            <a:off x="8321040" y="3566160"/>
+            <a:ext cx="548640" cy="228600"/>
           </a:xfrm>
           <a:prstGeom prst="rect">
             <a:avLst/>
@@ -3385,14 +3757,18 @@
           <a:noFill/>
         </p:spPr>
         <p:txBody>
-          <a:bodyPr wrap="none">
+          <a:bodyPr wrap="square">
             <a:spAutoFit/>
           </a:bodyPr>
           <a:lstStyle/>
           <a:p>
             <a:pPr algn="ctr"/>
             <a:r>
-              <a:rPr sz="800" b="1"/>
+              <a:rPr sz="800" b="1" i="0">
+                <a:solidFill>
+                  <a:srgbClr val="424242"/>
+                </a:solidFill>
+              </a:rPr>
               <a:t>2025</a:t>
             </a:r>
           </a:p>
@@ -3400,14 +3776,57 @@
       </p:sp>
       <p:sp>
         <p:nvSpPr>
-          <p:cNvPr id="12" name="TextBox 11"/>
+          <p:cNvPr id="20" name="Oval 19"/>
+          <p:cNvSpPr/>
+          <p:nvPr/>
+        </p:nvSpPr>
+        <p:spPr>
+          <a:xfrm>
+            <a:off x="9546336" y="3374136"/>
+            <a:ext cx="109728" cy="109728"/>
+          </a:xfrm>
+          <a:prstGeom prst="ellipse">
+            <a:avLst/>
+          </a:prstGeom>
+          <a:solidFill>
+            <a:srgbClr val="424242"/>
+          </a:solidFill>
+          <a:ln>
+            <a:noFill/>
+          </a:ln>
+        </p:spPr>
+        <p:style>
+          <a:lnRef idx="1">
+            <a:schemeClr val="accent1"/>
+          </a:lnRef>
+          <a:fillRef idx="3">
+            <a:schemeClr val="accent1"/>
+          </a:fillRef>
+          <a:effectRef idx="2">
+            <a:schemeClr val="accent1"/>
+          </a:effectRef>
+          <a:fontRef idx="minor">
+            <a:schemeClr val="lt1"/>
+          </a:fontRef>
+        </p:style>
+        <p:txBody>
+          <a:bodyPr rtlCol="0" anchor="ctr"/>
+          <a:lstStyle/>
+          <a:p>
+            <a:pPr algn="ctr"/>
+          </a:p>
+        </p:txBody>
+      </p:sp>
+      <p:sp>
+        <p:nvSpPr>
+          <p:cNvPr id="21" name="TextBox 20"/>
           <p:cNvSpPr txBox="1"/>
           <p:nvPr/>
         </p:nvSpPr>
         <p:spPr>
           <a:xfrm>
-            <a:off x="10094976" y="3520440"/>
-            <a:ext cx="731520" cy="274320"/>
+            <a:off x="9326880" y="3566160"/>
+            <a:ext cx="548640" cy="228600"/>
           </a:xfrm>
           <a:prstGeom prst="rect">
             <a:avLst/>
@@ -3415,14 +3834,18 @@
           <a:noFill/>
         </p:spPr>
         <p:txBody>
-          <a:bodyPr wrap="none">
+          <a:bodyPr wrap="square">
             <a:spAutoFit/>
           </a:bodyPr>
           <a:lstStyle/>
           <a:p>
             <a:pPr algn="ctr"/>
             <a:r>
-              <a:rPr sz="800" b="1"/>
+              <a:rPr sz="800" b="1" i="0">
+                <a:solidFill>
+                  <a:srgbClr val="424242"/>
+                </a:solidFill>
+              </a:rPr>
               <a:t>2026</a:t>
             </a:r>
           </a:p>
@@ -3430,14 +3853,14 @@
       </p:sp>
       <p:sp>
         <p:nvSpPr>
-          <p:cNvPr id="13" name="TextBox 12"/>
+          <p:cNvPr id="22" name="TextBox 21"/>
           <p:cNvSpPr txBox="1"/>
           <p:nvPr/>
         </p:nvSpPr>
         <p:spPr>
           <a:xfrm>
             <a:off x="182880" y="1371600"/>
-            <a:ext cx="1371600" cy="457200"/>
+            <a:ext cx="1188720" cy="640080"/>
           </a:xfrm>
           <a:prstGeom prst="rect">
             <a:avLst/>
@@ -3445,13 +3868,14 @@
           <a:noFill/>
         </p:spPr>
         <p:txBody>
-          <a:bodyPr wrap="none">
+          <a:bodyPr wrap="square">
             <a:spAutoFit/>
           </a:bodyPr>
           <a:lstStyle/>
           <a:p>
-            <a:r>
-              <a:rPr sz="900" b="1">
+            <a:pPr algn="ctr"/>
+            <a:r>
+              <a:rPr sz="900" b="1" i="0">
                 <a:solidFill>
                   <a:srgbClr val="1B3A5C"/>
                 </a:solidFill>
@@ -3465,14 +3889,14 @@
       </p:sp>
       <p:sp>
         <p:nvSpPr>
-          <p:cNvPr id="14" name="Rounded Rectangle 13"/>
+          <p:cNvPr id="23" name="Rounded Rectangle 22"/>
           <p:cNvSpPr/>
           <p:nvPr/>
         </p:nvSpPr>
         <p:spPr>
           <a:xfrm>
-            <a:off x="5596128" y="1371600"/>
-            <a:ext cx="1645920" cy="640080"/>
+            <a:off x="5021580" y="1188720"/>
+            <a:ext cx="1371600" cy="502920"/>
           </a:xfrm>
           <a:prstGeom prst="roundRect">
             <a:avLst/>
@@ -3501,17 +3925,10 @@
           </a:fontRef>
         </p:style>
         <p:txBody>
-          <a:bodyPr rtlCol="0" anchor="ctr" wrap="square" tIns="50800" bIns="50800"/>
-          <a:lstStyle/>
-          <a:p>
-            <a:pPr algn="ctr">
-              <a:spcBef>
-                <a:spcPts val="0"/>
-              </a:spcBef>
-              <a:spcAft>
-                <a:spcPts val="0"/>
-              </a:spcAft>
-            </a:pPr>
+          <a:bodyPr rtlCol="0" anchor="ctr" wrap="square" tIns="38100" bIns="38100" lIns="50800" rIns="50800"/>
+          <a:lstStyle/>
+          <a:p>
+            <a:pPr algn="ctr"/>
             <a:r>
               <a:rPr sz="700" b="0">
                 <a:solidFill>
@@ -3524,16 +3941,52 @@
           </a:p>
         </p:txBody>
       </p:sp>
-      <p:sp>
-        <p:nvSpPr>
-          <p:cNvPr id="15" name="Rounded Rectangle 14"/>
+      <p:cxnSp>
+        <p:nvCxnSpPr>
+          <p:cNvPr id="24" name="Connector 23"/>
+          <p:cNvCxnSpPr/>
+          <p:nvPr/>
+        </p:nvCxnSpPr>
+        <p:spPr>
+          <a:xfrm>
+            <a:off x="5661660" y="1691640"/>
+            <a:ext cx="0" cy="1664208"/>
+          </a:xfrm>
+          <a:prstGeom prst="line">
+            <a:avLst/>
+          </a:prstGeom>
+          <a:ln w="9525" prstDash="dash">
+            <a:solidFill>
+              <a:srgbClr val="1565C0"/>
+            </a:solidFill>
+            <a:prstDash val="dash"/>
+          </a:ln>
+        </p:spPr>
+        <p:style>
+          <a:lnRef idx="2">
+            <a:schemeClr val="accent1"/>
+          </a:lnRef>
+          <a:fillRef idx="0">
+            <a:schemeClr val="accent1"/>
+          </a:fillRef>
+          <a:effectRef idx="1">
+            <a:schemeClr val="accent1"/>
+          </a:effectRef>
+          <a:fontRef idx="minor">
+            <a:schemeClr val="tx1"/>
+          </a:fontRef>
+        </p:style>
+      </p:cxnSp>
+      <p:sp>
+        <p:nvSpPr>
+          <p:cNvPr id="25" name="Rounded Rectangle 24"/>
           <p:cNvSpPr/>
           <p:nvPr/>
         </p:nvSpPr>
         <p:spPr>
           <a:xfrm>
-            <a:off x="7620609" y="2194560"/>
-            <a:ext cx="1645920" cy="640080"/>
+            <a:off x="6781800" y="1828800"/>
+            <a:ext cx="1371600" cy="502920"/>
           </a:xfrm>
           <a:prstGeom prst="roundRect">
             <a:avLst/>
@@ -3562,17 +4015,10 @@
           </a:fontRef>
         </p:style>
         <p:txBody>
-          <a:bodyPr rtlCol="0" anchor="ctr" wrap="square" tIns="50800" bIns="50800"/>
-          <a:lstStyle/>
-          <a:p>
-            <a:pPr algn="ctr">
-              <a:spcBef>
-                <a:spcPts val="0"/>
-              </a:spcBef>
-              <a:spcAft>
-                <a:spcPts val="0"/>
-              </a:spcAft>
-            </a:pPr>
+          <a:bodyPr rtlCol="0" anchor="ctr" wrap="square" tIns="38100" bIns="38100" lIns="50800" rIns="50800"/>
+          <a:lstStyle/>
+          <a:p>
+            <a:pPr algn="ctr"/>
             <a:r>
               <a:rPr sz="700" b="0">
                 <a:solidFill>
@@ -3585,16 +4031,52 @@
           </a:p>
         </p:txBody>
       </p:sp>
-      <p:sp>
-        <p:nvSpPr>
-          <p:cNvPr id="16" name="Rounded Rectangle 15"/>
+      <p:cxnSp>
+        <p:nvCxnSpPr>
+          <p:cNvPr id="26" name="Connector 25"/>
+          <p:cNvCxnSpPr/>
+          <p:nvPr/>
+        </p:nvCxnSpPr>
+        <p:spPr>
+          <a:xfrm>
+            <a:off x="7421880" y="2331720"/>
+            <a:ext cx="0" cy="1024128"/>
+          </a:xfrm>
+          <a:prstGeom prst="line">
+            <a:avLst/>
+          </a:prstGeom>
+          <a:ln w="9525" prstDash="dash">
+            <a:solidFill>
+              <a:srgbClr val="1565C0"/>
+            </a:solidFill>
+            <a:prstDash val="dash"/>
+          </a:ln>
+        </p:spPr>
+        <p:style>
+          <a:lnRef idx="2">
+            <a:schemeClr val="accent1"/>
+          </a:lnRef>
+          <a:fillRef idx="0">
+            <a:schemeClr val="accent1"/>
+          </a:fillRef>
+          <a:effectRef idx="1">
+            <a:schemeClr val="accent1"/>
+          </a:effectRef>
+          <a:fontRef idx="minor">
+            <a:schemeClr val="tx1"/>
+          </a:fontRef>
+        </p:style>
+      </p:cxnSp>
+      <p:sp>
+        <p:nvSpPr>
+          <p:cNvPr id="27" name="Rounded Rectangle 26"/>
           <p:cNvSpPr/>
           <p:nvPr/>
         </p:nvSpPr>
         <p:spPr>
           <a:xfrm>
-            <a:off x="7845552" y="1371600"/>
-            <a:ext cx="1645920" cy="640080"/>
+            <a:off x="6781800" y="2468880"/>
+            <a:ext cx="1371600" cy="502920"/>
           </a:xfrm>
           <a:prstGeom prst="roundRect">
             <a:avLst/>
@@ -3623,39 +4105,68 @@
           </a:fontRef>
         </p:style>
         <p:txBody>
-          <a:bodyPr rtlCol="0" anchor="ctr" wrap="square" tIns="50800" bIns="50800"/>
-          <a:lstStyle/>
-          <a:p>
-            <a:pPr algn="ctr">
-              <a:spcBef>
-                <a:spcPts val="0"/>
-              </a:spcBef>
-              <a:spcAft>
-                <a:spcPts val="0"/>
-              </a:spcAft>
-            </a:pPr>
+          <a:bodyPr rtlCol="0" anchor="ctr" wrap="square" tIns="38100" bIns="38100" lIns="50800" rIns="50800"/>
+          <a:lstStyle/>
+          <a:p>
+            <a:pPr algn="ctr"/>
             <a:r>
               <a:rPr sz="700" b="0">
                 <a:solidFill>
                   <a:srgbClr val="424242"/>
                 </a:solidFill>
               </a:rPr>
-              <a:t>GLP-1 RA
-Monitoring</a:t>
-            </a:r>
-          </a:p>
-        </p:txBody>
-      </p:sp>
-      <p:sp>
-        <p:nvSpPr>
-          <p:cNvPr id="17" name="Rounded Rectangle 16"/>
+              <a:t>CV TUE
+Guideline v4.0</a:t>
+            </a:r>
+          </a:p>
+        </p:txBody>
+      </p:sp>
+      <p:cxnSp>
+        <p:nvCxnSpPr>
+          <p:cNvPr id="28" name="Connector 27"/>
+          <p:cNvCxnSpPr/>
+          <p:nvPr/>
+        </p:nvCxnSpPr>
+        <p:spPr>
+          <a:xfrm>
+            <a:off x="7421880" y="2971800"/>
+            <a:ext cx="0" cy="384048"/>
+          </a:xfrm>
+          <a:prstGeom prst="line">
+            <a:avLst/>
+          </a:prstGeom>
+          <a:ln w="9525" prstDash="dash">
+            <a:solidFill>
+              <a:srgbClr val="1565C0"/>
+            </a:solidFill>
+            <a:prstDash val="dash"/>
+          </a:ln>
+        </p:spPr>
+        <p:style>
+          <a:lnRef idx="2">
+            <a:schemeClr val="accent1"/>
+          </a:lnRef>
+          <a:fillRef idx="0">
+            <a:schemeClr val="accent1"/>
+          </a:fillRef>
+          <a:effectRef idx="1">
+            <a:schemeClr val="accent1"/>
+          </a:effectRef>
+          <a:fontRef idx="minor">
+            <a:schemeClr val="tx1"/>
+          </a:fontRef>
+        </p:style>
+      </p:cxnSp>
+      <p:sp>
+        <p:nvSpPr>
+          <p:cNvPr id="29" name="Rounded Rectangle 28"/>
           <p:cNvSpPr/>
           <p:nvPr/>
         </p:nvSpPr>
         <p:spPr>
           <a:xfrm>
-            <a:off x="8970263" y="2194560"/>
-            <a:ext cx="1645920" cy="640080"/>
+            <a:off x="7033260" y="1188720"/>
+            <a:ext cx="1371600" cy="502920"/>
           </a:xfrm>
           <a:prstGeom prst="roundRect">
             <a:avLst/>
@@ -3684,39 +4195,68 @@
           </a:fontRef>
         </p:style>
         <p:txBody>
-          <a:bodyPr rtlCol="0" anchor="ctr" wrap="square" tIns="50800" bIns="50800"/>
-          <a:lstStyle/>
-          <a:p>
-            <a:pPr algn="ctr">
-              <a:spcBef>
-                <a:spcPts val="0"/>
-              </a:spcBef>
-              <a:spcAft>
-                <a:spcPts val="0"/>
-              </a:spcAft>
-            </a:pPr>
+          <a:bodyPr rtlCol="0" anchor="ctr" wrap="square" tIns="38100" bIns="38100" lIns="50800" rIns="50800"/>
+          <a:lstStyle/>
+          <a:p>
+            <a:pPr algn="ctr"/>
             <a:r>
               <a:rPr sz="700" b="0">
                 <a:solidFill>
                   <a:srgbClr val="424242"/>
                 </a:solidFill>
               </a:rPr>
-              <a:t>PCOS TUE GL v2.0
-Hypogonadism update</a:t>
-            </a:r>
-          </a:p>
-        </p:txBody>
-      </p:sp>
-      <p:sp>
-        <p:nvSpPr>
-          <p:cNvPr id="18" name="Rounded Rectangle 17"/>
+              <a:t>GLP-1 RA
+Monitoring</a:t>
+            </a:r>
+          </a:p>
+        </p:txBody>
+      </p:sp>
+      <p:cxnSp>
+        <p:nvCxnSpPr>
+          <p:cNvPr id="30" name="Connector 29"/>
+          <p:cNvCxnSpPr/>
+          <p:nvPr/>
+        </p:nvCxnSpPr>
+        <p:spPr>
+          <a:xfrm>
+            <a:off x="7673340" y="1691640"/>
+            <a:ext cx="0" cy="1664208"/>
+          </a:xfrm>
+          <a:prstGeom prst="line">
+            <a:avLst/>
+          </a:prstGeom>
+          <a:ln w="9525" prstDash="dash">
+            <a:solidFill>
+              <a:srgbClr val="1565C0"/>
+            </a:solidFill>
+            <a:prstDash val="dash"/>
+          </a:ln>
+        </p:spPr>
+        <p:style>
+          <a:lnRef idx="2">
+            <a:schemeClr val="accent1"/>
+          </a:lnRef>
+          <a:fillRef idx="0">
+            <a:schemeClr val="accent1"/>
+          </a:fillRef>
+          <a:effectRef idx="1">
+            <a:schemeClr val="accent1"/>
+          </a:effectRef>
+          <a:fontRef idx="minor">
+            <a:schemeClr val="tx1"/>
+          </a:fontRef>
+        </p:style>
+      </p:cxnSp>
+      <p:sp>
+        <p:nvSpPr>
+          <p:cNvPr id="31" name="Rounded Rectangle 30"/>
           <p:cNvSpPr/>
           <p:nvPr/>
         </p:nvSpPr>
         <p:spPr>
           <a:xfrm>
-            <a:off x="10094976" y="1371600"/>
-            <a:ext cx="1645920" cy="640080"/>
+            <a:off x="8039100" y="1828800"/>
+            <a:ext cx="1371600" cy="502920"/>
           </a:xfrm>
           <a:prstGeom prst="roundRect">
             <a:avLst/>
@@ -3745,39 +4285,338 @@
           </a:fontRef>
         </p:style>
         <p:txBody>
-          <a:bodyPr rtlCol="0" anchor="ctr" wrap="square" tIns="50800" bIns="50800"/>
-          <a:lstStyle/>
-          <a:p>
-            <a:pPr algn="ctr">
-              <a:spcBef>
-                <a:spcPts val="0"/>
-              </a:spcBef>
-              <a:spcAft>
-                <a:spcPts val="0"/>
-              </a:spcAft>
-            </a:pPr>
+          <a:bodyPr rtlCol="0" anchor="ctr" wrap="square" tIns="38100" bIns="38100" lIns="50800" rIns="50800"/>
+          <a:lstStyle/>
+          <a:p>
+            <a:pPr algn="ctr"/>
             <a:r>
               <a:rPr sz="700" b="0">
                 <a:solidFill>
                   <a:srgbClr val="424242"/>
                 </a:solidFill>
               </a:rPr>
-              <a:t>Asthma TUE v9.3
-ADHD TUE v8.0</a:t>
-            </a:r>
-          </a:p>
-        </p:txBody>
-      </p:sp>
-      <p:sp>
-        <p:nvSpPr>
-          <p:cNvPr id="19" name="TextBox 18"/>
+              <a:t>PCOS TUE
+Guideline v2.0</a:t>
+            </a:r>
+          </a:p>
+        </p:txBody>
+      </p:sp>
+      <p:cxnSp>
+        <p:nvCxnSpPr>
+          <p:cNvPr id="32" name="Connector 31"/>
+          <p:cNvCxnSpPr/>
+          <p:nvPr/>
+        </p:nvCxnSpPr>
+        <p:spPr>
+          <a:xfrm>
+            <a:off x="8679180" y="2331720"/>
+            <a:ext cx="0" cy="1024128"/>
+          </a:xfrm>
+          <a:prstGeom prst="line">
+            <a:avLst/>
+          </a:prstGeom>
+          <a:ln w="9525" prstDash="dash">
+            <a:solidFill>
+              <a:srgbClr val="1565C0"/>
+            </a:solidFill>
+            <a:prstDash val="dash"/>
+          </a:ln>
+        </p:spPr>
+        <p:style>
+          <a:lnRef idx="2">
+            <a:schemeClr val="accent1"/>
+          </a:lnRef>
+          <a:fillRef idx="0">
+            <a:schemeClr val="accent1"/>
+          </a:fillRef>
+          <a:effectRef idx="1">
+            <a:schemeClr val="accent1"/>
+          </a:effectRef>
+          <a:fontRef idx="minor">
+            <a:schemeClr val="tx1"/>
+          </a:fontRef>
+        </p:style>
+      </p:cxnSp>
+      <p:sp>
+        <p:nvSpPr>
+          <p:cNvPr id="33" name="Rounded Rectangle 32"/>
+          <p:cNvSpPr/>
+          <p:nvPr/>
+        </p:nvSpPr>
+        <p:spPr>
+          <a:xfrm>
+            <a:off x="8961120" y="2468880"/>
+            <a:ext cx="1371600" cy="502920"/>
+          </a:xfrm>
+          <a:prstGeom prst="roundRect">
+            <a:avLst/>
+          </a:prstGeom>
+          <a:solidFill>
+            <a:srgbClr val="E3F2FD"/>
+          </a:solidFill>
+          <a:ln w="19050">
+            <a:solidFill>
+              <a:srgbClr val="1565C0"/>
+            </a:solidFill>
+          </a:ln>
+        </p:spPr>
+        <p:style>
+          <a:lnRef idx="1">
+            <a:schemeClr val="accent1"/>
+          </a:lnRef>
+          <a:fillRef idx="3">
+            <a:schemeClr val="accent1"/>
+          </a:fillRef>
+          <a:effectRef idx="2">
+            <a:schemeClr val="accent1"/>
+          </a:effectRef>
+          <a:fontRef idx="minor">
+            <a:schemeClr val="lt1"/>
+          </a:fontRef>
+        </p:style>
+        <p:txBody>
+          <a:bodyPr rtlCol="0" anchor="ctr" wrap="square" tIns="38100" bIns="38100" lIns="50800" rIns="50800"/>
+          <a:lstStyle/>
+          <a:p>
+            <a:pPr algn="ctr"/>
+            <a:r>
+              <a:rPr sz="700" b="0">
+                <a:solidFill>
+                  <a:srgbClr val="424242"/>
+                </a:solidFill>
+              </a:rPr>
+              <a:t>Hypogonadism
+TUE update</a:t>
+            </a:r>
+          </a:p>
+        </p:txBody>
+      </p:sp>
+      <p:cxnSp>
+        <p:nvCxnSpPr>
+          <p:cNvPr id="34" name="Connector 33"/>
+          <p:cNvCxnSpPr/>
+          <p:nvPr/>
+        </p:nvCxnSpPr>
+        <p:spPr>
+          <a:xfrm>
+            <a:off x="9601200" y="2971800"/>
+            <a:ext cx="0" cy="384048"/>
+          </a:xfrm>
+          <a:prstGeom prst="line">
+            <a:avLst/>
+          </a:prstGeom>
+          <a:ln w="9525" prstDash="dash">
+            <a:solidFill>
+              <a:srgbClr val="1565C0"/>
+            </a:solidFill>
+            <a:prstDash val="dash"/>
+          </a:ln>
+        </p:spPr>
+        <p:style>
+          <a:lnRef idx="2">
+            <a:schemeClr val="accent1"/>
+          </a:lnRef>
+          <a:fillRef idx="0">
+            <a:schemeClr val="accent1"/>
+          </a:fillRef>
+          <a:effectRef idx="1">
+            <a:schemeClr val="accent1"/>
+          </a:effectRef>
+          <a:fontRef idx="minor">
+            <a:schemeClr val="tx1"/>
+          </a:fontRef>
+        </p:style>
+      </p:cxnSp>
+      <p:sp>
+        <p:nvSpPr>
+          <p:cNvPr id="35" name="Rounded Rectangle 34"/>
+          <p:cNvSpPr/>
+          <p:nvPr/>
+        </p:nvSpPr>
+        <p:spPr>
+          <a:xfrm>
+            <a:off x="9044940" y="1188720"/>
+            <a:ext cx="1371600" cy="502920"/>
+          </a:xfrm>
+          <a:prstGeom prst="roundRect">
+            <a:avLst/>
+          </a:prstGeom>
+          <a:solidFill>
+            <a:srgbClr val="E3F2FD"/>
+          </a:solidFill>
+          <a:ln w="19050">
+            <a:solidFill>
+              <a:srgbClr val="1565C0"/>
+            </a:solidFill>
+          </a:ln>
+        </p:spPr>
+        <p:style>
+          <a:lnRef idx="1">
+            <a:schemeClr val="accent1"/>
+          </a:lnRef>
+          <a:fillRef idx="3">
+            <a:schemeClr val="accent1"/>
+          </a:fillRef>
+          <a:effectRef idx="2">
+            <a:schemeClr val="accent1"/>
+          </a:effectRef>
+          <a:fontRef idx="minor">
+            <a:schemeClr val="lt1"/>
+          </a:fontRef>
+        </p:style>
+        <p:txBody>
+          <a:bodyPr rtlCol="0" anchor="ctr" wrap="square" tIns="38100" bIns="38100" lIns="50800" rIns="50800"/>
+          <a:lstStyle/>
+          <a:p>
+            <a:pPr algn="ctr"/>
+            <a:r>
+              <a:rPr sz="700" b="0">
+                <a:solidFill>
+                  <a:srgbClr val="424242"/>
+                </a:solidFill>
+              </a:rPr>
+              <a:t>Asthma TUE
+v9.3</a:t>
+            </a:r>
+          </a:p>
+        </p:txBody>
+      </p:sp>
+      <p:cxnSp>
+        <p:nvCxnSpPr>
+          <p:cNvPr id="36" name="Connector 35"/>
+          <p:cNvCxnSpPr/>
+          <p:nvPr/>
+        </p:nvCxnSpPr>
+        <p:spPr>
+          <a:xfrm>
+            <a:off x="9685020" y="1691640"/>
+            <a:ext cx="0" cy="1664208"/>
+          </a:xfrm>
+          <a:prstGeom prst="line">
+            <a:avLst/>
+          </a:prstGeom>
+          <a:ln w="9525" prstDash="dash">
+            <a:solidFill>
+              <a:srgbClr val="1565C0"/>
+            </a:solidFill>
+            <a:prstDash val="dash"/>
+          </a:ln>
+        </p:spPr>
+        <p:style>
+          <a:lnRef idx="2">
+            <a:schemeClr val="accent1"/>
+          </a:lnRef>
+          <a:fillRef idx="0">
+            <a:schemeClr val="accent1"/>
+          </a:fillRef>
+          <a:effectRef idx="1">
+            <a:schemeClr val="accent1"/>
+          </a:effectRef>
+          <a:fontRef idx="minor">
+            <a:schemeClr val="tx1"/>
+          </a:fontRef>
+        </p:style>
+      </p:cxnSp>
+      <p:sp>
+        <p:nvSpPr>
+          <p:cNvPr id="37" name="Rounded Rectangle 36"/>
+          <p:cNvSpPr/>
+          <p:nvPr/>
+        </p:nvSpPr>
+        <p:spPr>
+          <a:xfrm>
+            <a:off x="9044940" y="1828800"/>
+            <a:ext cx="1371600" cy="502920"/>
+          </a:xfrm>
+          <a:prstGeom prst="roundRect">
+            <a:avLst/>
+          </a:prstGeom>
+          <a:solidFill>
+            <a:srgbClr val="E3F2FD"/>
+          </a:solidFill>
+          <a:ln w="19050">
+            <a:solidFill>
+              <a:srgbClr val="1565C0"/>
+            </a:solidFill>
+          </a:ln>
+        </p:spPr>
+        <p:style>
+          <a:lnRef idx="1">
+            <a:schemeClr val="accent1"/>
+          </a:lnRef>
+          <a:fillRef idx="3">
+            <a:schemeClr val="accent1"/>
+          </a:fillRef>
+          <a:effectRef idx="2">
+            <a:schemeClr val="accent1"/>
+          </a:effectRef>
+          <a:fontRef idx="minor">
+            <a:schemeClr val="lt1"/>
+          </a:fontRef>
+        </p:style>
+        <p:txBody>
+          <a:bodyPr rtlCol="0" anchor="ctr" wrap="square" tIns="38100" bIns="38100" lIns="50800" rIns="50800"/>
+          <a:lstStyle/>
+          <a:p>
+            <a:pPr algn="ctr"/>
+            <a:r>
+              <a:rPr sz="700" b="0">
+                <a:solidFill>
+                  <a:srgbClr val="424242"/>
+                </a:solidFill>
+              </a:rPr>
+              <a:t>ADHD TUE
+v8.0</a:t>
+            </a:r>
+          </a:p>
+        </p:txBody>
+      </p:sp>
+      <p:cxnSp>
+        <p:nvCxnSpPr>
+          <p:cNvPr id="38" name="Connector 37"/>
+          <p:cNvCxnSpPr/>
+          <p:nvPr/>
+        </p:nvCxnSpPr>
+        <p:spPr>
+          <a:xfrm>
+            <a:off x="9685020" y="2331720"/>
+            <a:ext cx="0" cy="1024128"/>
+          </a:xfrm>
+          <a:prstGeom prst="line">
+            <a:avLst/>
+          </a:prstGeom>
+          <a:ln w="9525" prstDash="dash">
+            <a:solidFill>
+              <a:srgbClr val="1565C0"/>
+            </a:solidFill>
+            <a:prstDash val="dash"/>
+          </a:ln>
+        </p:spPr>
+        <p:style>
+          <a:lnRef idx="2">
+            <a:schemeClr val="accent1"/>
+          </a:lnRef>
+          <a:fillRef idx="0">
+            <a:schemeClr val="accent1"/>
+          </a:fillRef>
+          <a:effectRef idx="1">
+            <a:schemeClr val="accent1"/>
+          </a:effectRef>
+          <a:fontRef idx="minor">
+            <a:schemeClr val="tx1"/>
+          </a:fontRef>
+        </p:style>
+      </p:cxnSp>
+      <p:sp>
+        <p:nvSpPr>
+          <p:cNvPr id="39" name="TextBox 38"/>
           <p:cNvSpPr txBox="1"/>
           <p:nvPr/>
         </p:nvSpPr>
         <p:spPr>
           <a:xfrm>
             <a:off x="182880" y="4389120"/>
-            <a:ext cx="1371600" cy="457200"/>
+            <a:ext cx="1188720" cy="640080"/>
           </a:xfrm>
           <a:prstGeom prst="rect">
             <a:avLst/>
@@ -3785,13 +4624,14 @@
           <a:noFill/>
         </p:spPr>
         <p:txBody>
-          <a:bodyPr wrap="none">
+          <a:bodyPr wrap="square">
             <a:spAutoFit/>
           </a:bodyPr>
           <a:lstStyle/>
           <a:p>
-            <a:r>
-              <a:rPr sz="900" b="1">
+            <a:pPr algn="ctr"/>
+            <a:r>
+              <a:rPr sz="900" b="1" i="0">
                 <a:solidFill>
                   <a:srgbClr val="2E7D32"/>
                 </a:solidFill>
@@ -3805,14 +4645,14 @@
       </p:sp>
       <p:sp>
         <p:nvSpPr>
-          <p:cNvPr id="20" name="Rounded Rectangle 19"/>
+          <p:cNvPr id="40" name="Rounded Rectangle 39"/>
           <p:cNvSpPr/>
           <p:nvPr/>
         </p:nvSpPr>
         <p:spPr>
           <a:xfrm>
-            <a:off x="1659636" y="4114800"/>
-            <a:ext cx="1645920" cy="640080"/>
+            <a:off x="1417320" y="4114800"/>
+            <a:ext cx="1371600" cy="502920"/>
           </a:xfrm>
           <a:prstGeom prst="roundRect">
             <a:avLst/>
@@ -3841,17 +4681,10 @@
           </a:fontRef>
         </p:style>
         <p:txBody>
-          <a:bodyPr rtlCol="0" anchor="ctr" wrap="square" tIns="50800" bIns="50800"/>
-          <a:lstStyle/>
-          <a:p>
-            <a:pPr algn="ctr">
-              <a:spcBef>
-                <a:spcPts val="0"/>
-              </a:spcBef>
-              <a:spcAft>
-                <a:spcPts val="0"/>
-              </a:spcAft>
-            </a:pPr>
+          <a:bodyPr rtlCol="0" anchor="ctr" wrap="square" tIns="38100" bIns="38100" lIns="50800" rIns="50800"/>
+          <a:lstStyle/>
+          <a:p>
+            <a:pPr algn="ctr"/>
             <a:r>
               <a:rPr sz="700" b="0">
                 <a:solidFill>
@@ -3864,16 +4697,52 @@
           </a:p>
         </p:txBody>
       </p:sp>
-      <p:sp>
-        <p:nvSpPr>
-          <p:cNvPr id="21" name="Rounded Rectangle 20"/>
+      <p:cxnSp>
+        <p:nvCxnSpPr>
+          <p:cNvPr id="41" name="Connector 40"/>
+          <p:cNvCxnSpPr/>
+          <p:nvPr/>
+        </p:nvCxnSpPr>
+        <p:spPr>
+          <a:xfrm>
+            <a:off x="2057400" y="3502152"/>
+            <a:ext cx="0" cy="612648"/>
+          </a:xfrm>
+          <a:prstGeom prst="line">
+            <a:avLst/>
+          </a:prstGeom>
+          <a:ln w="9525">
+            <a:solidFill>
+              <a:srgbClr val="2E7D32"/>
+            </a:solidFill>
+            <a:prstDash val="dash"/>
+          </a:ln>
+        </p:spPr>
+        <p:style>
+          <a:lnRef idx="2">
+            <a:schemeClr val="accent1"/>
+          </a:lnRef>
+          <a:fillRef idx="0">
+            <a:schemeClr val="accent1"/>
+          </a:fillRef>
+          <a:effectRef idx="1">
+            <a:schemeClr val="accent1"/>
+          </a:effectRef>
+          <a:fontRef idx="minor">
+            <a:schemeClr val="tx1"/>
+          </a:fontRef>
+        </p:style>
+      </p:cxnSp>
+      <p:sp>
+        <p:nvSpPr>
+          <p:cNvPr id="42" name="Rounded Rectangle 41"/>
           <p:cNvSpPr/>
           <p:nvPr/>
         </p:nvSpPr>
         <p:spPr>
           <a:xfrm>
-            <a:off x="5596128" y="4937760"/>
-            <a:ext cx="1645920" cy="640080"/>
+            <a:off x="5021580" y="4754880"/>
+            <a:ext cx="1371600" cy="502920"/>
           </a:xfrm>
           <a:prstGeom prst="roundRect">
             <a:avLst/>
@@ -3902,17 +4771,10 @@
           </a:fontRef>
         </p:style>
         <p:txBody>
-          <a:bodyPr rtlCol="0" anchor="ctr" wrap="square" tIns="50800" bIns="50800"/>
-          <a:lstStyle/>
-          <a:p>
-            <a:pPr algn="ctr">
-              <a:spcBef>
-                <a:spcPts val="0"/>
-              </a:spcBef>
-              <a:spcAft>
-                <a:spcPts val="0"/>
-              </a:spcAft>
-            </a:pPr>
+          <a:bodyPr rtlCol="0" anchor="ctr" wrap="square" tIns="38100" bIns="38100" lIns="50800" rIns="50800"/>
+          <a:lstStyle/>
+          <a:p>
+            <a:pPr algn="ctr"/>
             <a:r>
               <a:rPr sz="700" b="0">
                 <a:solidFill>
@@ -3925,16 +4787,52 @@
           </a:p>
         </p:txBody>
       </p:sp>
-      <p:sp>
-        <p:nvSpPr>
-          <p:cNvPr id="22" name="Rounded Rectangle 21"/>
+      <p:cxnSp>
+        <p:nvCxnSpPr>
+          <p:cNvPr id="43" name="Connector 42"/>
+          <p:cNvCxnSpPr/>
+          <p:nvPr/>
+        </p:nvCxnSpPr>
+        <p:spPr>
+          <a:xfrm>
+            <a:off x="5661660" y="3502152"/>
+            <a:ext cx="0" cy="1252728"/>
+          </a:xfrm>
+          <a:prstGeom prst="line">
+            <a:avLst/>
+          </a:prstGeom>
+          <a:ln w="9525">
+            <a:solidFill>
+              <a:srgbClr val="2E7D32"/>
+            </a:solidFill>
+            <a:prstDash val="dash"/>
+          </a:ln>
+        </p:spPr>
+        <p:style>
+          <a:lnRef idx="2">
+            <a:schemeClr val="accent1"/>
+          </a:lnRef>
+          <a:fillRef idx="0">
+            <a:schemeClr val="accent1"/>
+          </a:fillRef>
+          <a:effectRef idx="1">
+            <a:schemeClr val="accent1"/>
+          </a:effectRef>
+          <a:fontRef idx="minor">
+            <a:schemeClr val="tx1"/>
+          </a:fontRef>
+        </p:style>
+      </p:cxnSp>
+      <p:sp>
+        <p:nvSpPr>
+          <p:cNvPr id="44" name="Rounded Rectangle 43"/>
           <p:cNvSpPr/>
           <p:nvPr/>
         </p:nvSpPr>
         <p:spPr>
           <a:xfrm>
-            <a:off x="7283196" y="4114800"/>
-            <a:ext cx="1645920" cy="640080"/>
+            <a:off x="6446520" y="5394960"/>
+            <a:ext cx="1371600" cy="502920"/>
           </a:xfrm>
           <a:prstGeom prst="roundRect">
             <a:avLst/>
@@ -3963,39 +4861,68 @@
           </a:fontRef>
         </p:style>
         <p:txBody>
-          <a:bodyPr rtlCol="0" anchor="ctr" wrap="square" tIns="50800" bIns="50800"/>
-          <a:lstStyle/>
-          <a:p>
-            <a:pPr algn="ctr">
-              <a:spcBef>
-                <a:spcPts val="0"/>
-              </a:spcBef>
-              <a:spcAft>
-                <a:spcPts val="0"/>
-              </a:spcAft>
-            </a:pPr>
+          <a:bodyPr rtlCol="0" anchor="ctr" wrap="square" tIns="38100" bIns="38100" lIns="50800" rIns="50800"/>
+          <a:lstStyle/>
+          <a:p>
+            <a:pPr algn="ctr"/>
             <a:r>
               <a:rPr sz="700" b="0">
                 <a:solidFill>
                   <a:srgbClr val="424242"/>
                 </a:solidFill>
               </a:rPr>
-              <a:t>PCOS Intl GL
-TRAVERSE trial</a:t>
-            </a:r>
-          </a:p>
-        </p:txBody>
-      </p:sp>
-      <p:sp>
-        <p:nvSpPr>
-          <p:cNvPr id="23" name="Rounded Rectangle 22"/>
+              <a:t>PCOS Intl.
+GL revised</a:t>
+            </a:r>
+          </a:p>
+        </p:txBody>
+      </p:sp>
+      <p:cxnSp>
+        <p:nvCxnSpPr>
+          <p:cNvPr id="45" name="Connector 44"/>
+          <p:cNvCxnSpPr/>
+          <p:nvPr/>
+        </p:nvCxnSpPr>
+        <p:spPr>
+          <a:xfrm>
+            <a:off x="7086600" y="3502152"/>
+            <a:ext cx="0" cy="1892808"/>
+          </a:xfrm>
+          <a:prstGeom prst="line">
+            <a:avLst/>
+          </a:prstGeom>
+          <a:ln w="9525">
+            <a:solidFill>
+              <a:srgbClr val="2E7D32"/>
+            </a:solidFill>
+            <a:prstDash val="dash"/>
+          </a:ln>
+        </p:spPr>
+        <p:style>
+          <a:lnRef idx="2">
+            <a:schemeClr val="accent1"/>
+          </a:lnRef>
+          <a:fillRef idx="0">
+            <a:schemeClr val="accent1"/>
+          </a:fillRef>
+          <a:effectRef idx="1">
+            <a:schemeClr val="accent1"/>
+          </a:effectRef>
+          <a:fontRef idx="minor">
+            <a:schemeClr val="tx1"/>
+          </a:fontRef>
+        </p:style>
+      </p:cxnSp>
+      <p:sp>
+        <p:nvSpPr>
+          <p:cNvPr id="46" name="Rounded Rectangle 45"/>
           <p:cNvSpPr/>
           <p:nvPr/>
         </p:nvSpPr>
         <p:spPr>
           <a:xfrm>
-            <a:off x="8407908" y="4937760"/>
-            <a:ext cx="1645920" cy="640080"/>
+            <a:off x="6614160" y="4114800"/>
+            <a:ext cx="1371600" cy="502920"/>
           </a:xfrm>
           <a:prstGeom prst="roundRect">
             <a:avLst/>
@@ -4024,39 +4951,68 @@
           </a:fontRef>
         </p:style>
         <p:txBody>
-          <a:bodyPr rtlCol="0" anchor="ctr" wrap="square" tIns="50800" bIns="50800"/>
-          <a:lstStyle/>
-          <a:p>
-            <a:pPr algn="ctr">
-              <a:spcBef>
-                <a:spcPts val="0"/>
-              </a:spcBef>
-              <a:spcAft>
-                <a:spcPts val="0"/>
-              </a:spcAft>
-            </a:pPr>
+          <a:bodyPr rtlCol="0" anchor="ctr" wrap="square" tIns="38100" bIns="38100" lIns="50800" rIns="50800"/>
+          <a:lstStyle/>
+          <a:p>
+            <a:pPr algn="ctr"/>
             <a:r>
               <a:rPr sz="700" b="0">
                 <a:solidFill>
                   <a:srgbClr val="424242"/>
                 </a:solidFill>
               </a:rPr>
-              <a:t>NICE ADHD
-EAU Reprod Health</a:t>
-            </a:r>
-          </a:p>
-        </p:txBody>
-      </p:sp>
-      <p:sp>
-        <p:nvSpPr>
-          <p:cNvPr id="24" name="Rounded Rectangle 23"/>
+              <a:t>TRAVERSE trial
+(TRT safety)</a:t>
+            </a:r>
+          </a:p>
+        </p:txBody>
+      </p:sp>
+      <p:cxnSp>
+        <p:nvCxnSpPr>
+          <p:cNvPr id="47" name="Connector 46"/>
+          <p:cNvCxnSpPr/>
+          <p:nvPr/>
+        </p:nvCxnSpPr>
+        <p:spPr>
+          <a:xfrm>
+            <a:off x="7254240" y="3502152"/>
+            <a:ext cx="0" cy="612648"/>
+          </a:xfrm>
+          <a:prstGeom prst="line">
+            <a:avLst/>
+          </a:prstGeom>
+          <a:ln w="9525">
+            <a:solidFill>
+              <a:srgbClr val="2E7D32"/>
+            </a:solidFill>
+            <a:prstDash val="dash"/>
+          </a:ln>
+        </p:spPr>
+        <p:style>
+          <a:lnRef idx="2">
+            <a:schemeClr val="accent1"/>
+          </a:lnRef>
+          <a:fillRef idx="0">
+            <a:schemeClr val="accent1"/>
+          </a:fillRef>
+          <a:effectRef idx="1">
+            <a:schemeClr val="accent1"/>
+          </a:effectRef>
+          <a:fontRef idx="minor">
+            <a:schemeClr val="tx1"/>
+          </a:fontRef>
+        </p:style>
+      </p:cxnSp>
+      <p:sp>
+        <p:nvSpPr>
+          <p:cNvPr id="48" name="Rounded Rectangle 47"/>
           <p:cNvSpPr/>
           <p:nvPr/>
         </p:nvSpPr>
         <p:spPr>
           <a:xfrm>
-            <a:off x="9420148" y="4114800"/>
-            <a:ext cx="1645920" cy="640080"/>
+            <a:off x="6781800" y="4754880"/>
+            <a:ext cx="1371600" cy="502920"/>
           </a:xfrm>
           <a:prstGeom prst="roundRect">
             <a:avLst/>
@@ -4085,17 +5041,370 @@
           </a:fontRef>
         </p:style>
         <p:txBody>
-          <a:bodyPr rtlCol="0" anchor="ctr" wrap="square" tIns="50800" bIns="50800"/>
-          <a:lstStyle/>
-          <a:p>
-            <a:pPr algn="ctr">
-              <a:spcBef>
-                <a:spcPts val="0"/>
-              </a:spcBef>
-              <a:spcAft>
-                <a:spcPts val="0"/>
-              </a:spcAft>
-            </a:pPr>
+          <a:bodyPr rtlCol="0" anchor="ctr" wrap="square" tIns="38100" bIns="38100" lIns="50800" rIns="50800"/>
+          <a:lstStyle/>
+          <a:p>
+            <a:pPr algn="ctr"/>
+            <a:r>
+              <a:rPr sz="700" b="0">
+                <a:solidFill>
+                  <a:srgbClr val="424242"/>
+                </a:solidFill>
+              </a:rPr>
+              <a:t>ESC/ESH
+Hypertension GL</a:t>
+            </a:r>
+          </a:p>
+        </p:txBody>
+      </p:sp>
+      <p:cxnSp>
+        <p:nvCxnSpPr>
+          <p:cNvPr id="49" name="Connector 48"/>
+          <p:cNvCxnSpPr/>
+          <p:nvPr/>
+        </p:nvCxnSpPr>
+        <p:spPr>
+          <a:xfrm>
+            <a:off x="7421880" y="3502152"/>
+            <a:ext cx="0" cy="1252728"/>
+          </a:xfrm>
+          <a:prstGeom prst="line">
+            <a:avLst/>
+          </a:prstGeom>
+          <a:ln w="9525">
+            <a:solidFill>
+              <a:srgbClr val="2E7D32"/>
+            </a:solidFill>
+            <a:prstDash val="dash"/>
+          </a:ln>
+        </p:spPr>
+        <p:style>
+          <a:lnRef idx="2">
+            <a:schemeClr val="accent1"/>
+          </a:lnRef>
+          <a:fillRef idx="0">
+            <a:schemeClr val="accent1"/>
+          </a:fillRef>
+          <a:effectRef idx="1">
+            <a:schemeClr val="accent1"/>
+          </a:effectRef>
+          <a:fontRef idx="minor">
+            <a:schemeClr val="tx1"/>
+          </a:fontRef>
+        </p:style>
+      </p:cxnSp>
+      <p:sp>
+        <p:nvSpPr>
+          <p:cNvPr id="50" name="Rounded Rectangle 49"/>
+          <p:cNvSpPr/>
+          <p:nvPr/>
+        </p:nvSpPr>
+        <p:spPr>
+          <a:xfrm>
+            <a:off x="7033260" y="5394960"/>
+            <a:ext cx="1371600" cy="502920"/>
+          </a:xfrm>
+          <a:prstGeom prst="roundRect">
+            <a:avLst/>
+          </a:prstGeom>
+          <a:solidFill>
+            <a:srgbClr val="E8F5E9"/>
+          </a:solidFill>
+          <a:ln w="19050">
+            <a:solidFill>
+              <a:srgbClr val="2E7D32"/>
+            </a:solidFill>
+          </a:ln>
+        </p:spPr>
+        <p:style>
+          <a:lnRef idx="1">
+            <a:schemeClr val="accent1"/>
+          </a:lnRef>
+          <a:fillRef idx="3">
+            <a:schemeClr val="accent1"/>
+          </a:fillRef>
+          <a:effectRef idx="2">
+            <a:schemeClr val="accent1"/>
+          </a:effectRef>
+          <a:fontRef idx="minor">
+            <a:schemeClr val="lt1"/>
+          </a:fontRef>
+        </p:style>
+        <p:txBody>
+          <a:bodyPr rtlCol="0" anchor="ctr" wrap="square" tIns="38100" bIns="38100" lIns="50800" rIns="50800"/>
+          <a:lstStyle/>
+          <a:p>
+            <a:pPr algn="ctr"/>
+            <a:r>
+              <a:rPr sz="700" b="0">
+                <a:solidFill>
+                  <a:srgbClr val="424242"/>
+                </a:solidFill>
+              </a:rPr>
+              <a:t>EAU Sexual/
+Reprod. Health</a:t>
+            </a:r>
+          </a:p>
+        </p:txBody>
+      </p:sp>
+      <p:cxnSp>
+        <p:nvCxnSpPr>
+          <p:cNvPr id="51" name="Connector 50"/>
+          <p:cNvCxnSpPr/>
+          <p:nvPr/>
+        </p:nvCxnSpPr>
+        <p:spPr>
+          <a:xfrm>
+            <a:off x="7673340" y="3502152"/>
+            <a:ext cx="0" cy="1892808"/>
+          </a:xfrm>
+          <a:prstGeom prst="line">
+            <a:avLst/>
+          </a:prstGeom>
+          <a:ln w="9525">
+            <a:solidFill>
+              <a:srgbClr val="2E7D32"/>
+            </a:solidFill>
+            <a:prstDash val="dash"/>
+          </a:ln>
+        </p:spPr>
+        <p:style>
+          <a:lnRef idx="2">
+            <a:schemeClr val="accent1"/>
+          </a:lnRef>
+          <a:fillRef idx="0">
+            <a:schemeClr val="accent1"/>
+          </a:fillRef>
+          <a:effectRef idx="1">
+            <a:schemeClr val="accent1"/>
+          </a:effectRef>
+          <a:fontRef idx="minor">
+            <a:schemeClr val="tx1"/>
+          </a:fontRef>
+        </p:style>
+      </p:cxnSp>
+      <p:sp>
+        <p:nvSpPr>
+          <p:cNvPr id="52" name="Rounded Rectangle 51"/>
+          <p:cNvSpPr/>
+          <p:nvPr/>
+        </p:nvSpPr>
+        <p:spPr>
+          <a:xfrm>
+            <a:off x="7452360" y="4114800"/>
+            <a:ext cx="1371600" cy="502920"/>
+          </a:xfrm>
+          <a:prstGeom prst="roundRect">
+            <a:avLst/>
+          </a:prstGeom>
+          <a:solidFill>
+            <a:srgbClr val="E8F5E9"/>
+          </a:solidFill>
+          <a:ln w="19050">
+            <a:solidFill>
+              <a:srgbClr val="2E7D32"/>
+            </a:solidFill>
+          </a:ln>
+        </p:spPr>
+        <p:style>
+          <a:lnRef idx="1">
+            <a:schemeClr val="accent1"/>
+          </a:lnRef>
+          <a:fillRef idx="3">
+            <a:schemeClr val="accent1"/>
+          </a:fillRef>
+          <a:effectRef idx="2">
+            <a:schemeClr val="accent1"/>
+          </a:effectRef>
+          <a:fontRef idx="minor">
+            <a:schemeClr val="lt1"/>
+          </a:fontRef>
+        </p:style>
+        <p:txBody>
+          <a:bodyPr rtlCol="0" anchor="ctr" wrap="square" tIns="38100" bIns="38100" lIns="50800" rIns="50800"/>
+          <a:lstStyle/>
+          <a:p>
+            <a:pPr algn="ctr"/>
+            <a:r>
+              <a:rPr sz="700" b="0">
+                <a:solidFill>
+                  <a:srgbClr val="424242"/>
+                </a:solidFill>
+              </a:rPr>
+              <a:t>NICE ADHD
+GL update</a:t>
+            </a:r>
+          </a:p>
+        </p:txBody>
+      </p:sp>
+      <p:cxnSp>
+        <p:nvCxnSpPr>
+          <p:cNvPr id="53" name="Connector 52"/>
+          <p:cNvCxnSpPr/>
+          <p:nvPr/>
+        </p:nvCxnSpPr>
+        <p:spPr>
+          <a:xfrm>
+            <a:off x="8092440" y="3502152"/>
+            <a:ext cx="0" cy="612648"/>
+          </a:xfrm>
+          <a:prstGeom prst="line">
+            <a:avLst/>
+          </a:prstGeom>
+          <a:ln w="9525">
+            <a:solidFill>
+              <a:srgbClr val="2E7D32"/>
+            </a:solidFill>
+            <a:prstDash val="dash"/>
+          </a:ln>
+        </p:spPr>
+        <p:style>
+          <a:lnRef idx="2">
+            <a:schemeClr val="accent1"/>
+          </a:lnRef>
+          <a:fillRef idx="0">
+            <a:schemeClr val="accent1"/>
+          </a:fillRef>
+          <a:effectRef idx="1">
+            <a:schemeClr val="accent1"/>
+          </a:effectRef>
+          <a:fontRef idx="minor">
+            <a:schemeClr val="tx1"/>
+          </a:fontRef>
+        </p:style>
+      </p:cxnSp>
+      <p:sp>
+        <p:nvSpPr>
+          <p:cNvPr id="54" name="Rounded Rectangle 53"/>
+          <p:cNvSpPr/>
+          <p:nvPr/>
+        </p:nvSpPr>
+        <p:spPr>
+          <a:xfrm>
+            <a:off x="8039100" y="4754880"/>
+            <a:ext cx="1371600" cy="502920"/>
+          </a:xfrm>
+          <a:prstGeom prst="roundRect">
+            <a:avLst/>
+          </a:prstGeom>
+          <a:solidFill>
+            <a:srgbClr val="E8F5E9"/>
+          </a:solidFill>
+          <a:ln w="19050">
+            <a:solidFill>
+              <a:srgbClr val="2E7D32"/>
+            </a:solidFill>
+          </a:ln>
+        </p:spPr>
+        <p:style>
+          <a:lnRef idx="1">
+            <a:schemeClr val="accent1"/>
+          </a:lnRef>
+          <a:fillRef idx="3">
+            <a:schemeClr val="accent1"/>
+          </a:fillRef>
+          <a:effectRef idx="2">
+            <a:schemeClr val="accent1"/>
+          </a:effectRef>
+          <a:fontRef idx="minor">
+            <a:schemeClr val="lt1"/>
+          </a:fontRef>
+        </p:style>
+        <p:txBody>
+          <a:bodyPr rtlCol="0" anchor="ctr" wrap="square" tIns="38100" bIns="38100" lIns="50800" rIns="50800"/>
+          <a:lstStyle/>
+          <a:p>
+            <a:pPr algn="ctr"/>
+            <a:r>
+              <a:rPr sz="700" b="0">
+                <a:solidFill>
+                  <a:srgbClr val="424242"/>
+                </a:solidFill>
+              </a:rPr>
+              <a:t>ADA Diabetes
+Standards 2025</a:t>
+            </a:r>
+          </a:p>
+        </p:txBody>
+      </p:sp>
+      <p:cxnSp>
+        <p:nvCxnSpPr>
+          <p:cNvPr id="55" name="Connector 54"/>
+          <p:cNvCxnSpPr/>
+          <p:nvPr/>
+        </p:nvCxnSpPr>
+        <p:spPr>
+          <a:xfrm>
+            <a:off x="8679180" y="3502152"/>
+            <a:ext cx="0" cy="1252728"/>
+          </a:xfrm>
+          <a:prstGeom prst="line">
+            <a:avLst/>
+          </a:prstGeom>
+          <a:ln w="9525">
+            <a:solidFill>
+              <a:srgbClr val="2E7D32"/>
+            </a:solidFill>
+            <a:prstDash val="dash"/>
+          </a:ln>
+        </p:spPr>
+        <p:style>
+          <a:lnRef idx="2">
+            <a:schemeClr val="accent1"/>
+          </a:lnRef>
+          <a:fillRef idx="0">
+            <a:schemeClr val="accent1"/>
+          </a:fillRef>
+          <a:effectRef idx="1">
+            <a:schemeClr val="accent1"/>
+          </a:effectRef>
+          <a:fontRef idx="minor">
+            <a:schemeClr val="tx1"/>
+          </a:fontRef>
+        </p:style>
+      </p:cxnSp>
+      <p:sp>
+        <p:nvSpPr>
+          <p:cNvPr id="56" name="Rounded Rectangle 55"/>
+          <p:cNvSpPr/>
+          <p:nvPr/>
+        </p:nvSpPr>
+        <p:spPr>
+          <a:xfrm>
+            <a:off x="8374380" y="5394960"/>
+            <a:ext cx="1371600" cy="502920"/>
+          </a:xfrm>
+          <a:prstGeom prst="roundRect">
+            <a:avLst/>
+          </a:prstGeom>
+          <a:solidFill>
+            <a:srgbClr val="E8F5E9"/>
+          </a:solidFill>
+          <a:ln w="19050">
+            <a:solidFill>
+              <a:srgbClr val="2E7D32"/>
+            </a:solidFill>
+          </a:ln>
+        </p:spPr>
+        <p:style>
+          <a:lnRef idx="1">
+            <a:schemeClr val="accent1"/>
+          </a:lnRef>
+          <a:fillRef idx="3">
+            <a:schemeClr val="accent1"/>
+          </a:fillRef>
+          <a:effectRef idx="2">
+            <a:schemeClr val="accent1"/>
+          </a:effectRef>
+          <a:fontRef idx="minor">
+            <a:schemeClr val="lt1"/>
+          </a:fontRef>
+        </p:style>
+        <p:txBody>
+          <a:bodyPr rtlCol="0" anchor="ctr" wrap="square" tIns="38100" bIns="38100" lIns="50800" rIns="50800"/>
+          <a:lstStyle/>
+          <a:p>
+            <a:pPr algn="ctr"/>
             <a:r>
               <a:rPr sz="700" b="0">
                 <a:solidFill>
@@ -4103,21 +5412,219 @@
                 </a:solidFill>
               </a:rPr>
               <a:t>GINA 2025
-ADA Diabetes 2025</a:t>
-            </a:r>
-          </a:p>
-        </p:txBody>
-      </p:sp>
-      <p:sp>
-        <p:nvSpPr>
-          <p:cNvPr id="25" name="TextBox 24"/>
+Asthma Strategy</a:t>
+            </a:r>
+          </a:p>
+        </p:txBody>
+      </p:sp>
+      <p:cxnSp>
+        <p:nvCxnSpPr>
+          <p:cNvPr id="57" name="Connector 56"/>
+          <p:cNvCxnSpPr/>
+          <p:nvPr/>
+        </p:nvCxnSpPr>
+        <p:spPr>
+          <a:xfrm>
+            <a:off x="9014460" y="3502152"/>
+            <a:ext cx="0" cy="1892808"/>
+          </a:xfrm>
+          <a:prstGeom prst="line">
+            <a:avLst/>
+          </a:prstGeom>
+          <a:ln w="9525">
+            <a:solidFill>
+              <a:srgbClr val="2E7D32"/>
+            </a:solidFill>
+            <a:prstDash val="dash"/>
+          </a:ln>
+        </p:spPr>
+        <p:style>
+          <a:lnRef idx="2">
+            <a:schemeClr val="accent1"/>
+          </a:lnRef>
+          <a:fillRef idx="0">
+            <a:schemeClr val="accent1"/>
+          </a:fillRef>
+          <a:effectRef idx="1">
+            <a:schemeClr val="accent1"/>
+          </a:effectRef>
+          <a:fontRef idx="minor">
+            <a:schemeClr val="tx1"/>
+          </a:fontRef>
+        </p:style>
+      </p:cxnSp>
+      <p:sp>
+        <p:nvSpPr>
+          <p:cNvPr id="58" name="Rounded Rectangle 57"/>
+          <p:cNvSpPr/>
+          <p:nvPr/>
+        </p:nvSpPr>
+        <p:spPr>
+          <a:xfrm>
+            <a:off x="8458200" y="4114800"/>
+            <a:ext cx="1371600" cy="502920"/>
+          </a:xfrm>
+          <a:prstGeom prst="roundRect">
+            <a:avLst/>
+          </a:prstGeom>
+          <a:solidFill>
+            <a:srgbClr val="E8F5E9"/>
+          </a:solidFill>
+          <a:ln w="19050">
+            <a:solidFill>
+              <a:srgbClr val="2E7D32"/>
+            </a:solidFill>
+          </a:ln>
+        </p:spPr>
+        <p:style>
+          <a:lnRef idx="1">
+            <a:schemeClr val="accent1"/>
+          </a:lnRef>
+          <a:fillRef idx="3">
+            <a:schemeClr val="accent1"/>
+          </a:fillRef>
+          <a:effectRef idx="2">
+            <a:schemeClr val="accent1"/>
+          </a:effectRef>
+          <a:fontRef idx="minor">
+            <a:schemeClr val="lt1"/>
+          </a:fontRef>
+        </p:style>
+        <p:txBody>
+          <a:bodyPr rtlCol="0" anchor="ctr" wrap="square" tIns="38100" bIns="38100" lIns="50800" rIns="50800"/>
+          <a:lstStyle/>
+          <a:p>
+            <a:pPr algn="ctr"/>
+            <a:r>
+              <a:rPr sz="700" b="0">
+                <a:solidFill>
+                  <a:srgbClr val="424242"/>
+                </a:solidFill>
+              </a:rPr>
+              <a:t>ESC Heart
+Failure GL</a:t>
+            </a:r>
+          </a:p>
+        </p:txBody>
+      </p:sp>
+      <p:cxnSp>
+        <p:nvCxnSpPr>
+          <p:cNvPr id="59" name="Connector 58"/>
+          <p:cNvCxnSpPr/>
+          <p:nvPr/>
+        </p:nvCxnSpPr>
+        <p:spPr>
+          <a:xfrm>
+            <a:off x="9098280" y="3502152"/>
+            <a:ext cx="0" cy="612648"/>
+          </a:xfrm>
+          <a:prstGeom prst="line">
+            <a:avLst/>
+          </a:prstGeom>
+          <a:ln w="9525">
+            <a:solidFill>
+              <a:srgbClr val="2E7D32"/>
+            </a:solidFill>
+            <a:prstDash val="dash"/>
+          </a:ln>
+        </p:spPr>
+        <p:style>
+          <a:lnRef idx="2">
+            <a:schemeClr val="accent1"/>
+          </a:lnRef>
+          <a:fillRef idx="0">
+            <a:schemeClr val="accent1"/>
+          </a:fillRef>
+          <a:effectRef idx="1">
+            <a:schemeClr val="accent1"/>
+          </a:effectRef>
+          <a:fontRef idx="minor">
+            <a:schemeClr val="tx1"/>
+          </a:fontRef>
+        </p:style>
+      </p:cxnSp>
+      <p:cxnSp>
+        <p:nvCxnSpPr>
+          <p:cNvPr id="60" name="Connector 59"/>
+          <p:cNvCxnSpPr/>
+          <p:nvPr/>
+        </p:nvCxnSpPr>
+        <p:spPr>
+          <a:xfrm flipV="1">
+            <a:off x="10515600" y="2926080"/>
+            <a:ext cx="0" cy="274320"/>
+          </a:xfrm>
+          <a:prstGeom prst="line">
+            <a:avLst/>
+          </a:prstGeom>
+          <a:ln w="19050">
+            <a:solidFill>
+              <a:srgbClr val="C62828"/>
+            </a:solidFill>
+            <a:tailEnd type="triangle" w="med" len="med"/>
+          </a:ln>
+        </p:spPr>
+        <p:style>
+          <a:lnRef idx="2">
+            <a:schemeClr val="accent1"/>
+          </a:lnRef>
+          <a:fillRef idx="0">
+            <a:schemeClr val="accent1"/>
+          </a:fillRef>
+          <a:effectRef idx="1">
+            <a:schemeClr val="accent1"/>
+          </a:effectRef>
+          <a:fontRef idx="minor">
+            <a:schemeClr val="tx1"/>
+          </a:fontRef>
+        </p:style>
+      </p:cxnSp>
+      <p:cxnSp>
+        <p:nvCxnSpPr>
+          <p:cNvPr id="61" name="Connector 60"/>
+          <p:cNvCxnSpPr/>
+          <p:nvPr/>
+        </p:nvCxnSpPr>
+        <p:spPr>
+          <a:xfrm>
+            <a:off x="10515600" y="3657600"/>
+            <a:ext cx="0" cy="274320"/>
+          </a:xfrm>
+          <a:prstGeom prst="line">
+            <a:avLst/>
+          </a:prstGeom>
+          <a:ln w="19050">
+            <a:solidFill>
+              <a:srgbClr val="C62828"/>
+            </a:solidFill>
+            <a:tailEnd type="triangle" w="med" len="med"/>
+          </a:ln>
+        </p:spPr>
+        <p:style>
+          <a:lnRef idx="2">
+            <a:schemeClr val="accent1"/>
+          </a:lnRef>
+          <a:fillRef idx="0">
+            <a:schemeClr val="accent1"/>
+          </a:fillRef>
+          <a:effectRef idx="1">
+            <a:schemeClr val="accent1"/>
+          </a:effectRef>
+          <a:fontRef idx="minor">
+            <a:schemeClr val="tx1"/>
+          </a:fontRef>
+        </p:style>
+      </p:cxnSp>
+      <p:sp>
+        <p:nvSpPr>
+          <p:cNvPr id="62" name="TextBox 61"/>
           <p:cNvSpPr txBox="1"/>
           <p:nvPr/>
         </p:nvSpPr>
         <p:spPr>
           <a:xfrm>
-            <a:off x="10515600" y="3108960"/>
-            <a:ext cx="914400" cy="640080"/>
+            <a:off x="10241280" y="3017520"/>
+            <a:ext cx="731520" cy="365760"/>
           </a:xfrm>
           <a:prstGeom prst="rect">
             <a:avLst/>
@@ -4125,14 +5632,14 @@
           <a:noFill/>
         </p:spPr>
         <p:txBody>
-          <a:bodyPr wrap="none">
+          <a:bodyPr wrap="square">
             <a:spAutoFit/>
           </a:bodyPr>
           <a:lstStyle/>
           <a:p>
             <a:pPr algn="ctr"/>
             <a:r>
-              <a:rPr sz="1400" b="1">
+              <a:rPr sz="1200" b="1" i="0">
                 <a:solidFill>
                   <a:srgbClr val="C62828"/>
                 </a:solidFill>
@@ -4144,14 +5651,14 @@
       </p:sp>
       <p:sp>
         <p:nvSpPr>
-          <p:cNvPr id="26" name="TextBox 25"/>
+          <p:cNvPr id="63" name="TextBox 62"/>
           <p:cNvSpPr txBox="1"/>
           <p:nvPr/>
         </p:nvSpPr>
         <p:spPr>
           <a:xfrm>
-            <a:off x="457200" y="6217920"/>
-            <a:ext cx="11247120" cy="548640"/>
+            <a:off x="457200" y="6400800"/>
+            <a:ext cx="11247120" cy="365760"/>
           </a:xfrm>
           <a:prstGeom prst="rect">
             <a:avLst/>
@@ -4166,7 +5673,7 @@
           <a:p>
             <a:pPr algn="ctr"/>
             <a:r>
-              <a:rPr sz="1200" i="1">
+              <a:rPr sz="1100" i="1">
                 <a:solidFill>
                   <a:srgbClr val="424242"/>
                 </a:solidFill>
